--- a/_doku/Praesentation_TwitchLandingpage_v3.pptx
+++ b/_doku/Praesentation_TwitchLandingpage_v3.pptx
@@ -5,17 +5,17 @@
     <p:sldMasterId id="2147483648" r:id="rId1"/>
   </p:sldMasterIdLst>
   <p:sldIdLst>
-    <p:sldId id="256" r:id="rId7"/>
-    <p:sldId id="257" r:id="rId8"/>
-    <p:sldId id="258" r:id="rId9"/>
-    <p:sldId id="259" r:id="rId10"/>
-    <p:sldId id="260" r:id="rId11"/>
-    <p:sldId id="261" r:id="rId12"/>
-    <p:sldId id="262" r:id="rId13"/>
-    <p:sldId id="263" r:id="rId14"/>
-    <p:sldId id="264" r:id="rId15"/>
+    <p:sldId id="256" r:id="rId2"/>
+    <p:sldId id="257" r:id="rId3"/>
+    <p:sldId id="258" r:id="rId4"/>
+    <p:sldId id="259" r:id="rId5"/>
+    <p:sldId id="260" r:id="rId6"/>
+    <p:sldId id="261" r:id="rId7"/>
+    <p:sldId id="262" r:id="rId8"/>
+    <p:sldId id="263" r:id="rId9"/>
+    <p:sldId id="264" r:id="rId10"/>
   </p:sldIdLst>
-  <p:sldSz cx="12191695" cy="6858000" type="screen4x3"/>
+  <p:sldSz cx="12192000" cy="6858000"/>
   <p:notesSz cx="6858000" cy="9144000"/>
   <p:defaultTextStyle>
     <a:defPPr>
@@ -112,6 +112,22 @@
       </a:defRPr>
     </a:lvl9pPr>
   </p:defaultTextStyle>
+  <p:extLst>
+    <p:ext uri="{EFAFB233-063F-42B5-8137-9DF3F51BA10A}">
+      <p15:sldGuideLst xmlns:p15="http://schemas.microsoft.com/office/powerpoint/2012/main">
+        <p15:guide id="1" orient="horz" pos="2160">
+          <p15:clr>
+            <a:srgbClr val="A4A3A4"/>
+          </p15:clr>
+        </p15:guide>
+        <p15:guide id="2" pos="2880">
+          <p15:clr>
+            <a:srgbClr val="A4A3A4"/>
+          </p15:clr>
+        </p15:guide>
+      </p15:sldGuideLst>
+    </p:ext>
+  </p:extLst>
 </p:presentation>
 </file>
 
@@ -153,10 +169,9 @@
           <a:lstStyle/>
           <a:p>
             <a:r>
-              <a:rPr lang="en-US" smtClean="0"/>
+              <a:rPr lang="en-US"/>
               <a:t>Click to edit Master title style</a:t>
             </a:r>
-            <a:endParaRPr lang="en-US"/>
           </a:p>
         </p:txBody>
       </p:sp>
@@ -272,10 +287,9 @@
           </a:lstStyle>
           <a:p>
             <a:r>
-              <a:rPr lang="en-US" smtClean="0"/>
+              <a:rPr lang="en-US"/>
               <a:t>Click to edit Master subtitle style</a:t>
             </a:r>
-            <a:endParaRPr lang="en-US"/>
           </a:p>
         </p:txBody>
       </p:sp>
@@ -296,7 +310,7 @@
           <a:p>
             <a:fld id="{5BCAD085-E8A6-8845-BD4E-CB4CCA059FC4}" type="datetimeFigureOut">
               <a:rPr lang="en-US" smtClean="0"/>
-              <a:t>1/27/13</a:t>
+              <a:t>5/11/2026</a:t>
             </a:fld>
             <a:endParaRPr lang="en-US"/>
           </a:p>
@@ -338,7 +352,7 @@
           <a:p>
             <a:fld id="{C1FF6DA9-008F-8B48-92A6-B652298478BF}" type="slidenum">
               <a:rPr lang="en-US" smtClean="0"/>
-              <a:t>‹#›</a:t>
+              <a:t>‹Nr.›</a:t>
             </a:fld>
             <a:endParaRPr lang="en-US"/>
           </a:p>
@@ -390,10 +404,9 @@
           <a:lstStyle/>
           <a:p>
             <a:r>
-              <a:rPr lang="en-US" smtClean="0"/>
+              <a:rPr lang="en-US"/>
               <a:t>Click to edit Master title style</a:t>
             </a:r>
-            <a:endParaRPr lang="en-US"/>
           </a:p>
         </p:txBody>
       </p:sp>
@@ -414,38 +427,37 @@
           <a:p>
             <a:pPr lvl="0"/>
             <a:r>
-              <a:rPr lang="en-US" smtClean="0"/>
+              <a:rPr lang="en-US"/>
               <a:t>Click to edit Master text styles</a:t>
             </a:r>
           </a:p>
           <a:p>
             <a:pPr lvl="1"/>
             <a:r>
-              <a:rPr lang="en-US" smtClean="0"/>
+              <a:rPr lang="en-US"/>
               <a:t>Second level</a:t>
             </a:r>
           </a:p>
           <a:p>
             <a:pPr lvl="2"/>
             <a:r>
-              <a:rPr lang="en-US" smtClean="0"/>
+              <a:rPr lang="en-US"/>
               <a:t>Third level</a:t>
             </a:r>
           </a:p>
           <a:p>
             <a:pPr lvl="3"/>
             <a:r>
-              <a:rPr lang="en-US" smtClean="0"/>
+              <a:rPr lang="en-US"/>
               <a:t>Fourth level</a:t>
             </a:r>
           </a:p>
           <a:p>
             <a:pPr lvl="4"/>
             <a:r>
-              <a:rPr lang="en-US" smtClean="0"/>
+              <a:rPr lang="en-US"/>
               <a:t>Fifth level</a:t>
             </a:r>
-            <a:endParaRPr lang="en-US"/>
           </a:p>
         </p:txBody>
       </p:sp>
@@ -466,7 +478,7 @@
           <a:p>
             <a:fld id="{5BCAD085-E8A6-8845-BD4E-CB4CCA059FC4}" type="datetimeFigureOut">
               <a:rPr lang="en-US" smtClean="0"/>
-              <a:t>1/27/13</a:t>
+              <a:t>5/11/2026</a:t>
             </a:fld>
             <a:endParaRPr lang="en-US"/>
           </a:p>
@@ -508,7 +520,7 @@
           <a:p>
             <a:fld id="{C1FF6DA9-008F-8B48-92A6-B652298478BF}" type="slidenum">
               <a:rPr lang="en-US" smtClean="0"/>
-              <a:t>‹#›</a:t>
+              <a:t>‹Nr.›</a:t>
             </a:fld>
             <a:endParaRPr lang="en-US"/>
           </a:p>
@@ -565,10 +577,9 @@
           <a:lstStyle/>
           <a:p>
             <a:r>
-              <a:rPr lang="en-US" smtClean="0"/>
+              <a:rPr lang="en-US"/>
               <a:t>Click to edit Master title style</a:t>
             </a:r>
-            <a:endParaRPr lang="en-US"/>
           </a:p>
         </p:txBody>
       </p:sp>
@@ -594,38 +605,37 @@
           <a:p>
             <a:pPr lvl="0"/>
             <a:r>
-              <a:rPr lang="en-US" smtClean="0"/>
+              <a:rPr lang="en-US"/>
               <a:t>Click to edit Master text styles</a:t>
             </a:r>
           </a:p>
           <a:p>
             <a:pPr lvl="1"/>
             <a:r>
-              <a:rPr lang="en-US" smtClean="0"/>
+              <a:rPr lang="en-US"/>
               <a:t>Second level</a:t>
             </a:r>
           </a:p>
           <a:p>
             <a:pPr lvl="2"/>
             <a:r>
-              <a:rPr lang="en-US" smtClean="0"/>
+              <a:rPr lang="en-US"/>
               <a:t>Third level</a:t>
             </a:r>
           </a:p>
           <a:p>
             <a:pPr lvl="3"/>
             <a:r>
-              <a:rPr lang="en-US" smtClean="0"/>
+              <a:rPr lang="en-US"/>
               <a:t>Fourth level</a:t>
             </a:r>
           </a:p>
           <a:p>
             <a:pPr lvl="4"/>
             <a:r>
-              <a:rPr lang="en-US" smtClean="0"/>
+              <a:rPr lang="en-US"/>
               <a:t>Fifth level</a:t>
             </a:r>
-            <a:endParaRPr lang="en-US"/>
           </a:p>
         </p:txBody>
       </p:sp>
@@ -646,7 +656,7 @@
           <a:p>
             <a:fld id="{5BCAD085-E8A6-8845-BD4E-CB4CCA059FC4}" type="datetimeFigureOut">
               <a:rPr lang="en-US" smtClean="0"/>
-              <a:t>1/27/13</a:t>
+              <a:t>5/11/2026</a:t>
             </a:fld>
             <a:endParaRPr lang="en-US"/>
           </a:p>
@@ -688,7 +698,7 @@
           <a:p>
             <a:fld id="{C1FF6DA9-008F-8B48-92A6-B652298478BF}" type="slidenum">
               <a:rPr lang="en-US" smtClean="0"/>
-              <a:t>‹#›</a:t>
+              <a:t>‹Nr.›</a:t>
             </a:fld>
             <a:endParaRPr lang="en-US"/>
           </a:p>
@@ -740,10 +750,9 @@
           <a:lstStyle/>
           <a:p>
             <a:r>
-              <a:rPr lang="en-US" smtClean="0"/>
+              <a:rPr lang="en-US"/>
               <a:t>Click to edit Master title style</a:t>
             </a:r>
-            <a:endParaRPr lang="en-US"/>
           </a:p>
         </p:txBody>
       </p:sp>
@@ -764,38 +773,37 @@
           <a:p>
             <a:pPr lvl="0"/>
             <a:r>
-              <a:rPr lang="en-US" smtClean="0"/>
+              <a:rPr lang="en-US"/>
               <a:t>Click to edit Master text styles</a:t>
             </a:r>
           </a:p>
           <a:p>
             <a:pPr lvl="1"/>
             <a:r>
-              <a:rPr lang="en-US" smtClean="0"/>
+              <a:rPr lang="en-US"/>
               <a:t>Second level</a:t>
             </a:r>
           </a:p>
           <a:p>
             <a:pPr lvl="2"/>
             <a:r>
-              <a:rPr lang="en-US" smtClean="0"/>
+              <a:rPr lang="en-US"/>
               <a:t>Third level</a:t>
             </a:r>
           </a:p>
           <a:p>
             <a:pPr lvl="3"/>
             <a:r>
-              <a:rPr lang="en-US" smtClean="0"/>
+              <a:rPr lang="en-US"/>
               <a:t>Fourth level</a:t>
             </a:r>
           </a:p>
           <a:p>
             <a:pPr lvl="4"/>
             <a:r>
-              <a:rPr lang="en-US" smtClean="0"/>
+              <a:rPr lang="en-US"/>
               <a:t>Fifth level</a:t>
             </a:r>
-            <a:endParaRPr lang="en-US"/>
           </a:p>
         </p:txBody>
       </p:sp>
@@ -816,7 +824,7 @@
           <a:p>
             <a:fld id="{5BCAD085-E8A6-8845-BD4E-CB4CCA059FC4}" type="datetimeFigureOut">
               <a:rPr lang="en-US" smtClean="0"/>
-              <a:t>1/27/13</a:t>
+              <a:t>5/11/2026</a:t>
             </a:fld>
             <a:endParaRPr lang="en-US"/>
           </a:p>
@@ -858,7 +866,7 @@
           <a:p>
             <a:fld id="{C1FF6DA9-008F-8B48-92A6-B652298478BF}" type="slidenum">
               <a:rPr lang="en-US" smtClean="0"/>
-              <a:t>‹#›</a:t>
+              <a:t>‹Nr.›</a:t>
             </a:fld>
             <a:endParaRPr lang="en-US"/>
           </a:p>
@@ -919,10 +927,9 @@
           </a:lstStyle>
           <a:p>
             <a:r>
-              <a:rPr lang="en-US" smtClean="0"/>
+              <a:rPr lang="en-US"/>
               <a:t>Click to edit Master title style</a:t>
             </a:r>
-            <a:endParaRPr lang="en-US"/>
           </a:p>
         </p:txBody>
       </p:sp>
@@ -1039,7 +1046,7 @@
           <a:p>
             <a:pPr lvl="0"/>
             <a:r>
-              <a:rPr lang="en-US" smtClean="0"/>
+              <a:rPr lang="en-US"/>
               <a:t>Click to edit Master text styles</a:t>
             </a:r>
           </a:p>
@@ -1062,7 +1069,7 @@
           <a:p>
             <a:fld id="{5BCAD085-E8A6-8845-BD4E-CB4CCA059FC4}" type="datetimeFigureOut">
               <a:rPr lang="en-US" smtClean="0"/>
-              <a:t>1/27/13</a:t>
+              <a:t>5/11/2026</a:t>
             </a:fld>
             <a:endParaRPr lang="en-US"/>
           </a:p>
@@ -1104,7 +1111,7 @@
           <a:p>
             <a:fld id="{C1FF6DA9-008F-8B48-92A6-B652298478BF}" type="slidenum">
               <a:rPr lang="en-US" smtClean="0"/>
-              <a:t>‹#›</a:t>
+              <a:t>‹Nr.›</a:t>
             </a:fld>
             <a:endParaRPr lang="en-US"/>
           </a:p>
@@ -1156,10 +1163,9 @@
           <a:lstStyle/>
           <a:p>
             <a:r>
-              <a:rPr lang="en-US" smtClean="0"/>
+              <a:rPr lang="en-US"/>
               <a:t>Click to edit Master title style</a:t>
             </a:r>
-            <a:endParaRPr lang="en-US"/>
           </a:p>
         </p:txBody>
       </p:sp>
@@ -1213,38 +1219,37 @@
           <a:p>
             <a:pPr lvl="0"/>
             <a:r>
-              <a:rPr lang="en-US" smtClean="0"/>
+              <a:rPr lang="en-US"/>
               <a:t>Click to edit Master text styles</a:t>
             </a:r>
           </a:p>
           <a:p>
             <a:pPr lvl="1"/>
             <a:r>
-              <a:rPr lang="en-US" smtClean="0"/>
+              <a:rPr lang="en-US"/>
               <a:t>Second level</a:t>
             </a:r>
           </a:p>
           <a:p>
             <a:pPr lvl="2"/>
             <a:r>
-              <a:rPr lang="en-US" smtClean="0"/>
+              <a:rPr lang="en-US"/>
               <a:t>Third level</a:t>
             </a:r>
           </a:p>
           <a:p>
             <a:pPr lvl="3"/>
             <a:r>
-              <a:rPr lang="en-US" smtClean="0"/>
+              <a:rPr lang="en-US"/>
               <a:t>Fourth level</a:t>
             </a:r>
           </a:p>
           <a:p>
             <a:pPr lvl="4"/>
             <a:r>
-              <a:rPr lang="en-US" smtClean="0"/>
+              <a:rPr lang="en-US"/>
               <a:t>Fifth level</a:t>
             </a:r>
-            <a:endParaRPr lang="en-US"/>
           </a:p>
         </p:txBody>
       </p:sp>
@@ -1298,38 +1303,37 @@
           <a:p>
             <a:pPr lvl="0"/>
             <a:r>
-              <a:rPr lang="en-US" smtClean="0"/>
+              <a:rPr lang="en-US"/>
               <a:t>Click to edit Master text styles</a:t>
             </a:r>
           </a:p>
           <a:p>
             <a:pPr lvl="1"/>
             <a:r>
-              <a:rPr lang="en-US" smtClean="0"/>
+              <a:rPr lang="en-US"/>
               <a:t>Second level</a:t>
             </a:r>
           </a:p>
           <a:p>
             <a:pPr lvl="2"/>
             <a:r>
-              <a:rPr lang="en-US" smtClean="0"/>
+              <a:rPr lang="en-US"/>
               <a:t>Third level</a:t>
             </a:r>
           </a:p>
           <a:p>
             <a:pPr lvl="3"/>
             <a:r>
-              <a:rPr lang="en-US" smtClean="0"/>
+              <a:rPr lang="en-US"/>
               <a:t>Fourth level</a:t>
             </a:r>
           </a:p>
           <a:p>
             <a:pPr lvl="4"/>
             <a:r>
-              <a:rPr lang="en-US" smtClean="0"/>
+              <a:rPr lang="en-US"/>
               <a:t>Fifth level</a:t>
             </a:r>
-            <a:endParaRPr lang="en-US"/>
           </a:p>
         </p:txBody>
       </p:sp>
@@ -1350,7 +1354,7 @@
           <a:p>
             <a:fld id="{5BCAD085-E8A6-8845-BD4E-CB4CCA059FC4}" type="datetimeFigureOut">
               <a:rPr lang="en-US" smtClean="0"/>
-              <a:t>1/27/13</a:t>
+              <a:t>5/11/2026</a:t>
             </a:fld>
             <a:endParaRPr lang="en-US"/>
           </a:p>
@@ -1392,7 +1396,7 @@
           <a:p>
             <a:fld id="{C1FF6DA9-008F-8B48-92A6-B652298478BF}" type="slidenum">
               <a:rPr lang="en-US" smtClean="0"/>
-              <a:t>‹#›</a:t>
+              <a:t>‹Nr.›</a:t>
             </a:fld>
             <a:endParaRPr lang="en-US"/>
           </a:p>
@@ -1448,10 +1452,9 @@
           </a:lstStyle>
           <a:p>
             <a:r>
-              <a:rPr lang="en-US" smtClean="0"/>
+              <a:rPr lang="en-US"/>
               <a:t>Click to edit Master title style</a:t>
             </a:r>
-            <a:endParaRPr lang="en-US"/>
           </a:p>
         </p:txBody>
       </p:sp>
@@ -1514,7 +1517,7 @@
           <a:p>
             <a:pPr lvl="0"/>
             <a:r>
-              <a:rPr lang="en-US" smtClean="0"/>
+              <a:rPr lang="en-US"/>
               <a:t>Click to edit Master text styles</a:t>
             </a:r>
           </a:p>
@@ -1570,38 +1573,37 @@
           <a:p>
             <a:pPr lvl="0"/>
             <a:r>
-              <a:rPr lang="en-US" smtClean="0"/>
+              <a:rPr lang="en-US"/>
               <a:t>Click to edit Master text styles</a:t>
             </a:r>
           </a:p>
           <a:p>
             <a:pPr lvl="1"/>
             <a:r>
-              <a:rPr lang="en-US" smtClean="0"/>
+              <a:rPr lang="en-US"/>
               <a:t>Second level</a:t>
             </a:r>
           </a:p>
           <a:p>
             <a:pPr lvl="2"/>
             <a:r>
-              <a:rPr lang="en-US" smtClean="0"/>
+              <a:rPr lang="en-US"/>
               <a:t>Third level</a:t>
             </a:r>
           </a:p>
           <a:p>
             <a:pPr lvl="3"/>
             <a:r>
-              <a:rPr lang="en-US" smtClean="0"/>
+              <a:rPr lang="en-US"/>
               <a:t>Fourth level</a:t>
             </a:r>
           </a:p>
           <a:p>
             <a:pPr lvl="4"/>
             <a:r>
-              <a:rPr lang="en-US" smtClean="0"/>
+              <a:rPr lang="en-US"/>
               <a:t>Fifth level</a:t>
             </a:r>
-            <a:endParaRPr lang="en-US"/>
           </a:p>
         </p:txBody>
       </p:sp>
@@ -1664,7 +1666,7 @@
           <a:p>
             <a:pPr lvl="0"/>
             <a:r>
-              <a:rPr lang="en-US" smtClean="0"/>
+              <a:rPr lang="en-US"/>
               <a:t>Click to edit Master text styles</a:t>
             </a:r>
           </a:p>
@@ -1720,38 +1722,37 @@
           <a:p>
             <a:pPr lvl="0"/>
             <a:r>
-              <a:rPr lang="en-US" smtClean="0"/>
+              <a:rPr lang="en-US"/>
               <a:t>Click to edit Master text styles</a:t>
             </a:r>
           </a:p>
           <a:p>
             <a:pPr lvl="1"/>
             <a:r>
-              <a:rPr lang="en-US" smtClean="0"/>
+              <a:rPr lang="en-US"/>
               <a:t>Second level</a:t>
             </a:r>
           </a:p>
           <a:p>
             <a:pPr lvl="2"/>
             <a:r>
-              <a:rPr lang="en-US" smtClean="0"/>
+              <a:rPr lang="en-US"/>
               <a:t>Third level</a:t>
             </a:r>
           </a:p>
           <a:p>
             <a:pPr lvl="3"/>
             <a:r>
-              <a:rPr lang="en-US" smtClean="0"/>
+              <a:rPr lang="en-US"/>
               <a:t>Fourth level</a:t>
             </a:r>
           </a:p>
           <a:p>
             <a:pPr lvl="4"/>
             <a:r>
-              <a:rPr lang="en-US" smtClean="0"/>
+              <a:rPr lang="en-US"/>
               <a:t>Fifth level</a:t>
             </a:r>
-            <a:endParaRPr lang="en-US"/>
           </a:p>
         </p:txBody>
       </p:sp>
@@ -1772,7 +1773,7 @@
           <a:p>
             <a:fld id="{5BCAD085-E8A6-8845-BD4E-CB4CCA059FC4}" type="datetimeFigureOut">
               <a:rPr lang="en-US" smtClean="0"/>
-              <a:t>1/27/13</a:t>
+              <a:t>5/11/2026</a:t>
             </a:fld>
             <a:endParaRPr lang="en-US"/>
           </a:p>
@@ -1814,7 +1815,7 @@
           <a:p>
             <a:fld id="{C1FF6DA9-008F-8B48-92A6-B652298478BF}" type="slidenum">
               <a:rPr lang="en-US" smtClean="0"/>
-              <a:t>‹#›</a:t>
+              <a:t>‹Nr.›</a:t>
             </a:fld>
             <a:endParaRPr lang="en-US"/>
           </a:p>
@@ -1866,10 +1867,9 @@
           <a:lstStyle/>
           <a:p>
             <a:r>
-              <a:rPr lang="en-US" smtClean="0"/>
+              <a:rPr lang="en-US"/>
               <a:t>Click to edit Master title style</a:t>
             </a:r>
-            <a:endParaRPr lang="en-US"/>
           </a:p>
         </p:txBody>
       </p:sp>
@@ -1890,7 +1890,7 @@
           <a:p>
             <a:fld id="{5BCAD085-E8A6-8845-BD4E-CB4CCA059FC4}" type="datetimeFigureOut">
               <a:rPr lang="en-US" smtClean="0"/>
-              <a:t>1/27/13</a:t>
+              <a:t>5/11/2026</a:t>
             </a:fld>
             <a:endParaRPr lang="en-US"/>
           </a:p>
@@ -1932,7 +1932,7 @@
           <a:p>
             <a:fld id="{C1FF6DA9-008F-8B48-92A6-B652298478BF}" type="slidenum">
               <a:rPr lang="en-US" smtClean="0"/>
-              <a:t>‹#›</a:t>
+              <a:t>‹Nr.›</a:t>
             </a:fld>
             <a:endParaRPr lang="en-US"/>
           </a:p>
@@ -1985,7 +1985,7 @@
           <a:p>
             <a:fld id="{5BCAD085-E8A6-8845-BD4E-CB4CCA059FC4}" type="datetimeFigureOut">
               <a:rPr lang="en-US" smtClean="0"/>
-              <a:t>1/27/13</a:t>
+              <a:t>5/11/2026</a:t>
             </a:fld>
             <a:endParaRPr lang="en-US"/>
           </a:p>
@@ -2027,7 +2027,7 @@
           <a:p>
             <a:fld id="{C1FF6DA9-008F-8B48-92A6-B652298478BF}" type="slidenum">
               <a:rPr lang="en-US" smtClean="0"/>
-              <a:t>‹#›</a:t>
+              <a:t>‹Nr.›</a:t>
             </a:fld>
             <a:endParaRPr lang="en-US"/>
           </a:p>
@@ -2088,10 +2088,9 @@
           </a:lstStyle>
           <a:p>
             <a:r>
-              <a:rPr lang="en-US" smtClean="0"/>
+              <a:rPr lang="en-US"/>
               <a:t>Click to edit Master title style</a:t>
             </a:r>
-            <a:endParaRPr lang="en-US"/>
           </a:p>
         </p:txBody>
       </p:sp>
@@ -2145,38 +2144,37 @@
           <a:p>
             <a:pPr lvl="0"/>
             <a:r>
-              <a:rPr lang="en-US" smtClean="0"/>
+              <a:rPr lang="en-US"/>
               <a:t>Click to edit Master text styles</a:t>
             </a:r>
           </a:p>
           <a:p>
             <a:pPr lvl="1"/>
             <a:r>
-              <a:rPr lang="en-US" smtClean="0"/>
+              <a:rPr lang="en-US"/>
               <a:t>Second level</a:t>
             </a:r>
           </a:p>
           <a:p>
             <a:pPr lvl="2"/>
             <a:r>
-              <a:rPr lang="en-US" smtClean="0"/>
+              <a:rPr lang="en-US"/>
               <a:t>Third level</a:t>
             </a:r>
           </a:p>
           <a:p>
             <a:pPr lvl="3"/>
             <a:r>
-              <a:rPr lang="en-US" smtClean="0"/>
+              <a:rPr lang="en-US"/>
               <a:t>Fourth level</a:t>
             </a:r>
           </a:p>
           <a:p>
             <a:pPr lvl="4"/>
             <a:r>
-              <a:rPr lang="en-US" smtClean="0"/>
+              <a:rPr lang="en-US"/>
               <a:t>Fifth level</a:t>
             </a:r>
-            <a:endParaRPr lang="en-US"/>
           </a:p>
         </p:txBody>
       </p:sp>
@@ -2239,7 +2237,7 @@
           <a:p>
             <a:pPr lvl="0"/>
             <a:r>
-              <a:rPr lang="en-US" smtClean="0"/>
+              <a:rPr lang="en-US"/>
               <a:t>Click to edit Master text styles</a:t>
             </a:r>
           </a:p>
@@ -2262,7 +2260,7 @@
           <a:p>
             <a:fld id="{5BCAD085-E8A6-8845-BD4E-CB4CCA059FC4}" type="datetimeFigureOut">
               <a:rPr lang="en-US" smtClean="0"/>
-              <a:t>1/27/13</a:t>
+              <a:t>5/11/2026</a:t>
             </a:fld>
             <a:endParaRPr lang="en-US"/>
           </a:p>
@@ -2304,7 +2302,7 @@
           <a:p>
             <a:fld id="{C1FF6DA9-008F-8B48-92A6-B652298478BF}" type="slidenum">
               <a:rPr lang="en-US" smtClean="0"/>
-              <a:t>‹#›</a:t>
+              <a:t>‹Nr.›</a:t>
             </a:fld>
             <a:endParaRPr lang="en-US"/>
           </a:p>
@@ -2365,10 +2363,9 @@
           </a:lstStyle>
           <a:p>
             <a:r>
-              <a:rPr lang="en-US" smtClean="0"/>
+              <a:rPr lang="en-US"/>
               <a:t>Click to edit Master title style</a:t>
             </a:r>
-            <a:endParaRPr lang="en-US"/>
           </a:p>
         </p:txBody>
       </p:sp>
@@ -2492,7 +2489,7 @@
           <a:p>
             <a:pPr lvl="0"/>
             <a:r>
-              <a:rPr lang="en-US" smtClean="0"/>
+              <a:rPr lang="en-US"/>
               <a:t>Click to edit Master text styles</a:t>
             </a:r>
           </a:p>
@@ -2515,7 +2512,7 @@
           <a:p>
             <a:fld id="{5BCAD085-E8A6-8845-BD4E-CB4CCA059FC4}" type="datetimeFigureOut">
               <a:rPr lang="en-US" smtClean="0"/>
-              <a:t>1/27/13</a:t>
+              <a:t>5/11/2026</a:t>
             </a:fld>
             <a:endParaRPr lang="en-US"/>
           </a:p>
@@ -2557,7 +2554,7 @@
           <a:p>
             <a:fld id="{C1FF6DA9-008F-8B48-92A6-B652298478BF}" type="slidenum">
               <a:rPr lang="en-US" smtClean="0"/>
-              <a:t>‹#›</a:t>
+              <a:t>‹Nr.›</a:t>
             </a:fld>
             <a:endParaRPr lang="en-US"/>
           </a:p>
@@ -2624,10 +2621,9 @@
           <a:lstStyle/>
           <a:p>
             <a:r>
-              <a:rPr lang="en-US" smtClean="0"/>
+              <a:rPr lang="en-US"/>
               <a:t>Click to edit Master title style</a:t>
             </a:r>
-            <a:endParaRPr lang="en-US"/>
           </a:p>
         </p:txBody>
       </p:sp>
@@ -2658,38 +2654,37 @@
           <a:p>
             <a:pPr lvl="0"/>
             <a:r>
-              <a:rPr lang="en-US" smtClean="0"/>
+              <a:rPr lang="en-US"/>
               <a:t>Click to edit Master text styles</a:t>
             </a:r>
           </a:p>
           <a:p>
             <a:pPr lvl="1"/>
             <a:r>
-              <a:rPr lang="en-US" smtClean="0"/>
+              <a:rPr lang="en-US"/>
               <a:t>Second level</a:t>
             </a:r>
           </a:p>
           <a:p>
             <a:pPr lvl="2"/>
             <a:r>
-              <a:rPr lang="en-US" smtClean="0"/>
+              <a:rPr lang="en-US"/>
               <a:t>Third level</a:t>
             </a:r>
           </a:p>
           <a:p>
             <a:pPr lvl="3"/>
             <a:r>
-              <a:rPr lang="en-US" smtClean="0"/>
+              <a:rPr lang="en-US"/>
               <a:t>Fourth level</a:t>
             </a:r>
           </a:p>
           <a:p>
             <a:pPr lvl="4"/>
             <a:r>
-              <a:rPr lang="en-US" smtClean="0"/>
+              <a:rPr lang="en-US"/>
               <a:t>Fifth level</a:t>
             </a:r>
-            <a:endParaRPr lang="en-US"/>
           </a:p>
         </p:txBody>
       </p:sp>
@@ -2728,7 +2723,7 @@
           <a:p>
             <a:fld id="{5BCAD085-E8A6-8845-BD4E-CB4CCA059FC4}" type="datetimeFigureOut">
               <a:rPr lang="en-US" smtClean="0"/>
-              <a:t>1/27/13</a:t>
+              <a:t>5/11/2026</a:t>
             </a:fld>
             <a:endParaRPr lang="en-US"/>
           </a:p>
@@ -2806,9 +2801,59 @@
           <a:p>
             <a:fld id="{C1FF6DA9-008F-8B48-92A6-B652298478BF}" type="slidenum">
               <a:rPr lang="en-US" smtClean="0"/>
-              <a:t>‹#›</a:t>
+              <a:t>‹Nr.›</a:t>
             </a:fld>
             <a:endParaRPr lang="en-US"/>
+          </a:p>
+        </p:txBody>
+      </p:sp>
+      <p:sp>
+        <p:nvSpPr>
+          <p:cNvPr id="8" name="Textfeld 7">
+            <a:extLst>
+              <a:ext uri="{FF2B5EF4-FFF2-40B4-BE49-F238E27FC236}">
+                <a16:creationId xmlns:a16="http://schemas.microsoft.com/office/drawing/2014/main" id="{41180E1C-49CE-C145-9F8F-F8C5114BF3ED}"/>
+              </a:ext>
+            </a:extLst>
+          </p:cNvPr>
+          <p:cNvSpPr txBox="1"/>
+          <p:nvPr userDrawn="1">
+            <p:extLst>
+              <p:ext uri="{1162E1C5-73C7-4A58-AE30-91384D911F3F}">
+                <p184:classification xmlns:p184="http://schemas.microsoft.com/office/powerpoint/2018/4/main" val="ftr"/>
+              </p:ext>
+            </p:extLst>
+          </p:nvPr>
+        </p:nvSpPr>
+        <p:spPr>
+          <a:xfrm>
+            <a:off x="5861812" y="6642100"/>
+            <a:ext cx="496888" cy="152400"/>
+          </a:xfrm>
+          <a:prstGeom prst="rect">
+            <a:avLst/>
+          </a:prstGeom>
+        </p:spPr>
+        <p:txBody>
+          <a:bodyPr horzOverflow="overflow" lIns="0" tIns="0" rIns="0" bIns="0">
+            <a:spAutoFit/>
+          </a:bodyPr>
+          <a:lstStyle/>
+          <a:p>
+            <a:pPr algn="l"/>
+            <a:r>
+              <a:rPr lang="de-DE" sz="1000">
+                <a:solidFill>
+                  <a:srgbClr val="000000">
+                    <a:alpha val="50000"/>
+                  </a:srgbClr>
+                </a:solidFill>
+                <a:latin typeface="Calibri" panose="020F0502020204030204" pitchFamily="34" charset="0"/>
+                <a:ea typeface="Calibri" panose="020F0502020204030204" pitchFamily="34" charset="0"/>
+                <a:cs typeface="Calibri" panose="020F0502020204030204" pitchFamily="34" charset="0"/>
+              </a:rPr>
+              <a:t>[INTERN]</a:t>
+            </a:r>
           </a:p>
         </p:txBody>
       </p:sp>
@@ -3087,7 +3132,7 @@
 </file>
 
 <file path=ppt/slides/slide1.xml><?xml version="1.0" encoding="utf-8"?>
-<p:sld xmlns:a="http://schemas.openxmlformats.org/drawingml/2006/main" xmlns:p="http://schemas.openxmlformats.org/presentationml/2006/main" xmlns:r="http://schemas.openxmlformats.org/officeDocument/2006/relationships">
+<p:sld xmlns:a="http://schemas.openxmlformats.org/drawingml/2006/main" xmlns:r="http://schemas.openxmlformats.org/officeDocument/2006/relationships" xmlns:p="http://schemas.openxmlformats.org/presentationml/2006/main">
   <p:cSld>
     <p:spTree>
       <p:nvGrpSpPr>
@@ -3095,7 +3140,14 @@
         <p:cNvGrpSpPr/>
         <p:nvPr/>
       </p:nvGrpSpPr>
-      <p:grpSpPr/>
+      <p:grpSpPr>
+        <a:xfrm>
+          <a:off x="0" y="0"/>
+          <a:ext cx="0" cy="0"/>
+          <a:chOff x="0" y="0"/>
+          <a:chExt cx="0" cy="0"/>
+        </a:xfrm>
+      </p:grpSpPr>
       <p:sp>
         <p:nvSpPr>
           <p:cNvPr id="2" name="Rectangle 1"/>
@@ -3137,6 +3189,7 @@
           <a:lstStyle/>
           <a:p>
             <a:pPr algn="ctr"/>
+            <a:endParaRPr/>
           </a:p>
         </p:txBody>
       </p:sp>
@@ -3180,6 +3233,7 @@
           <a:lstStyle/>
           <a:p>
             <a:pPr algn="ctr"/>
+            <a:endParaRPr/>
           </a:p>
         </p:txBody>
       </p:sp>
@@ -3223,6 +3277,7 @@
           <a:lstStyle/>
           <a:p>
             <a:pPr algn="ctr"/>
+            <a:endParaRPr/>
           </a:p>
         </p:txBody>
       </p:sp>
@@ -3266,6 +3321,7 @@
           <a:lstStyle/>
           <a:p>
             <a:pPr algn="ctr"/>
+            <a:endParaRPr/>
           </a:p>
         </p:txBody>
       </p:sp>
@@ -3277,29 +3333,29 @@
         </p:nvSpPr>
         <p:spPr>
           <a:xfrm>
-            <a:off x="960120" y="548640"/>
-            <a:ext cx="1828800" cy="365760"/>
-          </a:xfrm>
-          <a:prstGeom prst="rect">
-            <a:avLst/>
-          </a:prstGeom>
-          <a:noFill/>
-        </p:spPr>
-        <p:txBody>
-          <a:bodyPr wrap="square" lIns="0" rIns="0" tIns="0" bIns="0" anchor="t">
+            <a:off x="960120" y="660719"/>
+            <a:ext cx="1828800" cy="184666"/>
+          </a:xfrm>
+          <a:prstGeom prst="rect">
+            <a:avLst/>
+          </a:prstGeom>
+          <a:noFill/>
+        </p:spPr>
+        <p:txBody>
+          <a:bodyPr wrap="square" lIns="0" tIns="0" rIns="0" bIns="0" anchor="t">
             <a:spAutoFit/>
           </a:bodyPr>
           <a:lstStyle/>
           <a:p>
             <a:pPr algn="l"/>
             <a:r>
-              <a:rPr sz="1200" b="1" i="0">
+              <a:rPr sz="1200" b="1" i="0" dirty="0">
                 <a:solidFill>
                   <a:srgbClr val="FFFFFF"/>
                 </a:solidFill>
                 <a:latin typeface="Calibri"/>
               </a:rPr>
-              <a:t>LIVE  •  HD1920x1080</a:t>
+              <a:t>LIVE </a:t>
             </a:r>
           </a:p>
         </p:txBody>
@@ -3321,7 +3377,7 @@
           <a:noFill/>
         </p:spPr>
         <p:txBody>
-          <a:bodyPr wrap="square" lIns="0" rIns="0" tIns="0" bIns="0" anchor="t">
+          <a:bodyPr wrap="square" lIns="0" tIns="0" rIns="0" bIns="0" anchor="t">
             <a:spAutoFit/>
           </a:bodyPr>
           <a:lstStyle/>
@@ -3357,7 +3413,7 @@
           <a:noFill/>
         </p:spPr>
         <p:txBody>
-          <a:bodyPr wrap="square" lIns="0" rIns="0" tIns="0" bIns="0" anchor="t">
+          <a:bodyPr wrap="square" lIns="0" tIns="0" rIns="0" bIns="0" anchor="t">
             <a:spAutoFit/>
           </a:bodyPr>
           <a:lstStyle/>
@@ -3392,7 +3448,7 @@
           <a:noFill/>
         </p:spPr>
         <p:txBody>
-          <a:bodyPr wrap="square" lIns="0" rIns="0" tIns="0" bIns="0" anchor="t">
+          <a:bodyPr wrap="square" lIns="0" tIns="0" rIns="0" bIns="0" anchor="t">
             <a:spAutoFit/>
           </a:bodyPr>
           <a:lstStyle/>
@@ -3427,7 +3483,7 @@
           <a:noFill/>
         </p:spPr>
         <p:txBody>
-          <a:bodyPr wrap="square" lIns="0" rIns="0" tIns="0" bIns="0" anchor="t">
+          <a:bodyPr wrap="square" lIns="0" tIns="0" rIns="0" bIns="0" anchor="t">
             <a:spAutoFit/>
           </a:bodyPr>
           <a:lstStyle/>
@@ -3454,7 +3510,7 @@
 </file>
 
 <file path=ppt/slides/slide2.xml><?xml version="1.0" encoding="utf-8"?>
-<p:sld xmlns:a="http://schemas.openxmlformats.org/drawingml/2006/main" xmlns:p="http://schemas.openxmlformats.org/presentationml/2006/main" xmlns:r="http://schemas.openxmlformats.org/officeDocument/2006/relationships">
+<p:sld xmlns:a="http://schemas.openxmlformats.org/drawingml/2006/main" xmlns:r="http://schemas.openxmlformats.org/officeDocument/2006/relationships" xmlns:p="http://schemas.openxmlformats.org/presentationml/2006/main">
   <p:cSld>
     <p:spTree>
       <p:nvGrpSpPr>
@@ -3462,7 +3518,14 @@
         <p:cNvGrpSpPr/>
         <p:nvPr/>
       </p:nvGrpSpPr>
-      <p:grpSpPr/>
+      <p:grpSpPr>
+        <a:xfrm>
+          <a:off x="0" y="0"/>
+          <a:ext cx="0" cy="0"/>
+          <a:chOff x="0" y="0"/>
+          <a:chExt cx="0" cy="0"/>
+        </a:xfrm>
+      </p:grpSpPr>
       <p:sp>
         <p:nvSpPr>
           <p:cNvPr id="2" name="Rectangle 1"/>
@@ -3504,6 +3567,7 @@
           <a:lstStyle/>
           <a:p>
             <a:pPr algn="ctr"/>
+            <a:endParaRPr/>
           </a:p>
         </p:txBody>
       </p:sp>
@@ -3547,6 +3611,7 @@
           <a:lstStyle/>
           <a:p>
             <a:pPr algn="ctr"/>
+            <a:endParaRPr/>
           </a:p>
         </p:txBody>
       </p:sp>
@@ -3558,7 +3623,7 @@
         </p:nvSpPr>
         <p:spPr>
           <a:xfrm>
-            <a:off x="822960" y="457200"/>
+            <a:off x="822960" y="546283"/>
             <a:ext cx="7315200" cy="365760"/>
           </a:xfrm>
           <a:prstGeom prst="rect">
@@ -3567,14 +3632,14 @@
           <a:noFill/>
         </p:spPr>
         <p:txBody>
-          <a:bodyPr wrap="square" lIns="0" rIns="0" tIns="0" bIns="0" anchor="t">
+          <a:bodyPr wrap="square" lIns="0" tIns="0" rIns="0" bIns="0" anchor="t">
             <a:spAutoFit/>
           </a:bodyPr>
           <a:lstStyle/>
           <a:p>
             <a:pPr algn="l"/>
             <a:r>
-              <a:rPr sz="1200" b="1" i="0">
+              <a:rPr sz="1200" b="1" i="0" dirty="0">
                 <a:solidFill>
                   <a:srgbClr val="C77DFF"/>
                 </a:solidFill>
@@ -3602,7 +3667,7 @@
           <a:noFill/>
         </p:spPr>
         <p:txBody>
-          <a:bodyPr wrap="square" lIns="0" rIns="0" tIns="0" bIns="0" anchor="t">
+          <a:bodyPr wrap="square" lIns="0" tIns="0" rIns="0" bIns="0" anchor="t">
             <a:spAutoFit/>
           </a:bodyPr>
           <a:lstStyle/>
@@ -3637,7 +3702,7 @@
           <a:noFill/>
         </p:spPr>
         <p:txBody>
-          <a:bodyPr wrap="square" lIns="0" rIns="0" tIns="0" bIns="0" anchor="t">
+          <a:bodyPr wrap="square" lIns="0" tIns="0" rIns="0" bIns="0" anchor="t">
             <a:spAutoFit/>
           </a:bodyPr>
           <a:lstStyle/>
@@ -3697,6 +3762,7 @@
           <a:lstStyle/>
           <a:p>
             <a:pPr algn="ctr"/>
+            <a:endParaRPr/>
           </a:p>
         </p:txBody>
       </p:sp>
@@ -3717,7 +3783,7 @@
           <a:noFill/>
         </p:spPr>
         <p:txBody>
-          <a:bodyPr wrap="square" lIns="0" rIns="0" tIns="0" bIns="0" anchor="t">
+          <a:bodyPr wrap="square" lIns="0" tIns="0" rIns="0" bIns="0" anchor="t">
             <a:spAutoFit/>
           </a:bodyPr>
           <a:lstStyle/>
@@ -3752,7 +3818,7 @@
           <a:noFill/>
         </p:spPr>
         <p:txBody>
-          <a:bodyPr wrap="square" lIns="0" rIns="0" tIns="0" bIns="0" anchor="t">
+          <a:bodyPr wrap="square" lIns="0" tIns="0" rIns="0" bIns="0" anchor="t">
             <a:spAutoFit/>
           </a:bodyPr>
           <a:lstStyle/>
@@ -3787,7 +3853,7 @@
           <a:noFill/>
         </p:spPr>
         <p:txBody>
-          <a:bodyPr wrap="square" lIns="0" rIns="0" tIns="0" bIns="0" anchor="t">
+          <a:bodyPr wrap="square" lIns="0" tIns="0" rIns="0" bIns="0" anchor="t">
             <a:spAutoFit/>
           </a:bodyPr>
           <a:lstStyle/>
@@ -3822,7 +3888,7 @@
           <a:noFill/>
         </p:spPr>
         <p:txBody>
-          <a:bodyPr wrap="square" lIns="0" rIns="0" tIns="0" bIns="0" anchor="t">
+          <a:bodyPr wrap="square" lIns="0" tIns="0" rIns="0" bIns="0" anchor="t">
             <a:spAutoFit/>
           </a:bodyPr>
           <a:lstStyle/>
@@ -3882,6 +3948,7 @@
           <a:lstStyle/>
           <a:p>
             <a:pPr algn="ctr"/>
+            <a:endParaRPr/>
           </a:p>
         </p:txBody>
       </p:sp>
@@ -3902,7 +3969,7 @@
           <a:noFill/>
         </p:spPr>
         <p:txBody>
-          <a:bodyPr wrap="square" lIns="0" rIns="0" tIns="0" bIns="0" anchor="t">
+          <a:bodyPr wrap="square" lIns="0" tIns="0" rIns="0" bIns="0" anchor="t">
             <a:spAutoFit/>
           </a:bodyPr>
           <a:lstStyle/>
@@ -3937,7 +4004,7 @@
           <a:noFill/>
         </p:spPr>
         <p:txBody>
-          <a:bodyPr wrap="square" lIns="0" rIns="0" tIns="0" bIns="0" anchor="t">
+          <a:bodyPr wrap="square" lIns="0" tIns="0" rIns="0" bIns="0" anchor="t">
             <a:spAutoFit/>
           </a:bodyPr>
           <a:lstStyle/>
@@ -3972,7 +4039,7 @@
           <a:noFill/>
         </p:spPr>
         <p:txBody>
-          <a:bodyPr wrap="square" lIns="0" rIns="0" tIns="0" bIns="0" anchor="t">
+          <a:bodyPr wrap="square" lIns="0" tIns="0" rIns="0" bIns="0" anchor="t">
             <a:spAutoFit/>
           </a:bodyPr>
           <a:lstStyle/>
@@ -4007,7 +4074,7 @@
           <a:noFill/>
         </p:spPr>
         <p:txBody>
-          <a:bodyPr wrap="square" lIns="0" rIns="0" tIns="0" bIns="0" anchor="t">
+          <a:bodyPr wrap="square" lIns="0" tIns="0" rIns="0" bIns="0" anchor="t">
             <a:spAutoFit/>
           </a:bodyPr>
           <a:lstStyle/>
@@ -4067,6 +4134,7 @@
           <a:lstStyle/>
           <a:p>
             <a:pPr algn="ctr"/>
+            <a:endParaRPr/>
           </a:p>
         </p:txBody>
       </p:sp>
@@ -4087,7 +4155,7 @@
           <a:noFill/>
         </p:spPr>
         <p:txBody>
-          <a:bodyPr wrap="square" lIns="0" rIns="0" tIns="0" bIns="0" anchor="t">
+          <a:bodyPr wrap="square" lIns="0" tIns="0" rIns="0" bIns="0" anchor="t">
             <a:spAutoFit/>
           </a:bodyPr>
           <a:lstStyle/>
@@ -4122,7 +4190,7 @@
           <a:noFill/>
         </p:spPr>
         <p:txBody>
-          <a:bodyPr wrap="square" lIns="0" rIns="0" tIns="0" bIns="0" anchor="t">
+          <a:bodyPr wrap="square" lIns="0" tIns="0" rIns="0" bIns="0" anchor="t">
             <a:spAutoFit/>
           </a:bodyPr>
           <a:lstStyle/>
@@ -4157,7 +4225,7 @@
           <a:noFill/>
         </p:spPr>
         <p:txBody>
-          <a:bodyPr wrap="square" lIns="0" rIns="0" tIns="0" bIns="0" anchor="t">
+          <a:bodyPr wrap="square" lIns="0" tIns="0" rIns="0" bIns="0" anchor="t">
             <a:spAutoFit/>
           </a:bodyPr>
           <a:lstStyle/>
@@ -4192,7 +4260,7 @@
           <a:noFill/>
         </p:spPr>
         <p:txBody>
-          <a:bodyPr wrap="square" lIns="0" rIns="0" tIns="0" bIns="0" anchor="t">
+          <a:bodyPr wrap="square" lIns="0" tIns="0" rIns="0" bIns="0" anchor="t">
             <a:spAutoFit/>
           </a:bodyPr>
           <a:lstStyle/>
@@ -4252,6 +4320,7 @@
           <a:lstStyle/>
           <a:p>
             <a:pPr algn="ctr"/>
+            <a:endParaRPr/>
           </a:p>
         </p:txBody>
       </p:sp>
@@ -4272,7 +4341,7 @@
           <a:noFill/>
         </p:spPr>
         <p:txBody>
-          <a:bodyPr wrap="square" lIns="0" rIns="0" tIns="0" bIns="0" anchor="t">
+          <a:bodyPr wrap="square" lIns="0" tIns="0" rIns="0" bIns="0" anchor="t">
             <a:spAutoFit/>
           </a:bodyPr>
           <a:lstStyle/>
@@ -4307,7 +4376,7 @@
           <a:noFill/>
         </p:spPr>
         <p:txBody>
-          <a:bodyPr wrap="square" lIns="0" rIns="0" tIns="0" bIns="0" anchor="t">
+          <a:bodyPr wrap="square" lIns="0" tIns="0" rIns="0" bIns="0" anchor="t">
             <a:spAutoFit/>
           </a:bodyPr>
           <a:lstStyle/>
@@ -4342,7 +4411,7 @@
           <a:noFill/>
         </p:spPr>
         <p:txBody>
-          <a:bodyPr wrap="square" lIns="0" rIns="0" tIns="0" bIns="0" anchor="t">
+          <a:bodyPr wrap="square" lIns="0" tIns="0" rIns="0" bIns="0" anchor="t">
             <a:spAutoFit/>
           </a:bodyPr>
           <a:lstStyle/>
@@ -4377,7 +4446,7 @@
           <a:noFill/>
         </p:spPr>
         <p:txBody>
-          <a:bodyPr wrap="square" lIns="0" rIns="0" tIns="0" bIns="0" anchor="t">
+          <a:bodyPr wrap="square" lIns="0" tIns="0" rIns="0" bIns="0" anchor="t">
             <a:spAutoFit/>
           </a:bodyPr>
           <a:lstStyle/>
@@ -4412,7 +4481,7 @@
           <a:noFill/>
         </p:spPr>
         <p:txBody>
-          <a:bodyPr wrap="square" lIns="0" rIns="0" tIns="0" bIns="0" anchor="t">
+          <a:bodyPr wrap="square" lIns="0" tIns="0" rIns="0" bIns="0" anchor="t">
             <a:spAutoFit/>
           </a:bodyPr>
           <a:lstStyle/>
@@ -4439,7 +4508,7 @@
 </file>
 
 <file path=ppt/slides/slide3.xml><?xml version="1.0" encoding="utf-8"?>
-<p:sld xmlns:a="http://schemas.openxmlformats.org/drawingml/2006/main" xmlns:p="http://schemas.openxmlformats.org/presentationml/2006/main" xmlns:r="http://schemas.openxmlformats.org/officeDocument/2006/relationships">
+<p:sld xmlns:a="http://schemas.openxmlformats.org/drawingml/2006/main" xmlns:r="http://schemas.openxmlformats.org/officeDocument/2006/relationships" xmlns:p="http://schemas.openxmlformats.org/presentationml/2006/main">
   <p:cSld>
     <p:spTree>
       <p:nvGrpSpPr>
@@ -4447,7 +4516,14 @@
         <p:cNvGrpSpPr/>
         <p:nvPr/>
       </p:nvGrpSpPr>
-      <p:grpSpPr/>
+      <p:grpSpPr>
+        <a:xfrm>
+          <a:off x="0" y="0"/>
+          <a:ext cx="0" cy="0"/>
+          <a:chOff x="0" y="0"/>
+          <a:chExt cx="0" cy="0"/>
+        </a:xfrm>
+      </p:grpSpPr>
       <p:sp>
         <p:nvSpPr>
           <p:cNvPr id="2" name="Rectangle 1"/>
@@ -4489,6 +4565,7 @@
           <a:lstStyle/>
           <a:p>
             <a:pPr algn="ctr"/>
+            <a:endParaRPr/>
           </a:p>
         </p:txBody>
       </p:sp>
@@ -4532,6 +4609,7 @@
           <a:lstStyle/>
           <a:p>
             <a:pPr algn="ctr"/>
+            <a:endParaRPr/>
           </a:p>
         </p:txBody>
       </p:sp>
@@ -4543,7 +4621,7 @@
         </p:nvSpPr>
         <p:spPr>
           <a:xfrm>
-            <a:off x="822960" y="457200"/>
+            <a:off x="822960" y="542043"/>
             <a:ext cx="7315200" cy="365760"/>
           </a:xfrm>
           <a:prstGeom prst="rect">
@@ -4552,14 +4630,14 @@
           <a:noFill/>
         </p:spPr>
         <p:txBody>
-          <a:bodyPr wrap="square" lIns="0" rIns="0" tIns="0" bIns="0" anchor="t">
+          <a:bodyPr wrap="square" lIns="0" tIns="0" rIns="0" bIns="0" anchor="t">
             <a:spAutoFit/>
           </a:bodyPr>
           <a:lstStyle/>
           <a:p>
             <a:pPr algn="l"/>
             <a:r>
-              <a:rPr sz="1200" b="1" i="0">
+              <a:rPr sz="1200" b="1" i="0" dirty="0">
                 <a:solidFill>
                   <a:srgbClr val="C77DFF"/>
                 </a:solidFill>
@@ -4587,7 +4665,7 @@
           <a:noFill/>
         </p:spPr>
         <p:txBody>
-          <a:bodyPr wrap="square" lIns="0" rIns="0" tIns="0" bIns="0" anchor="t">
+          <a:bodyPr wrap="square" lIns="0" tIns="0" rIns="0" bIns="0" anchor="t">
             <a:spAutoFit/>
           </a:bodyPr>
           <a:lstStyle/>
@@ -4622,7 +4700,7 @@
           <a:noFill/>
         </p:spPr>
         <p:txBody>
-          <a:bodyPr wrap="square" lIns="0" rIns="0" tIns="0" bIns="0" anchor="t">
+          <a:bodyPr wrap="square" lIns="0" tIns="0" rIns="0" bIns="0" anchor="t">
             <a:spAutoFit/>
           </a:bodyPr>
           <a:lstStyle/>
@@ -4682,6 +4760,7 @@
           <a:lstStyle/>
           <a:p>
             <a:pPr algn="ctr"/>
+            <a:endParaRPr/>
           </a:p>
         </p:txBody>
       </p:sp>
@@ -4725,6 +4804,7 @@
           <a:lstStyle/>
           <a:p>
             <a:pPr algn="ctr"/>
+            <a:endParaRPr/>
           </a:p>
         </p:txBody>
       </p:sp>
@@ -4745,7 +4825,7 @@
           <a:noFill/>
         </p:spPr>
         <p:txBody>
-          <a:bodyPr wrap="square" lIns="0" rIns="0" tIns="0" bIns="0" anchor="t">
+          <a:bodyPr wrap="square" lIns="0" tIns="0" rIns="0" bIns="0" anchor="t">
             <a:spAutoFit/>
           </a:bodyPr>
           <a:lstStyle/>
@@ -4780,7 +4860,7 @@
           <a:noFill/>
         </p:spPr>
         <p:txBody>
-          <a:bodyPr wrap="square" lIns="0" rIns="0" tIns="0" bIns="0" anchor="t">
+          <a:bodyPr wrap="square" lIns="0" tIns="0" rIns="0" bIns="0" anchor="t">
             <a:spAutoFit/>
           </a:bodyPr>
           <a:lstStyle/>
@@ -4815,7 +4895,7 @@
           <a:noFill/>
         </p:spPr>
         <p:txBody>
-          <a:bodyPr wrap="square" lIns="0" rIns="0" tIns="0" bIns="0" anchor="t">
+          <a:bodyPr wrap="square" lIns="0" tIns="0" rIns="0" bIns="0" anchor="t">
             <a:spAutoFit/>
           </a:bodyPr>
           <a:lstStyle/>
@@ -4876,6 +4956,7 @@
           <a:lstStyle/>
           <a:p>
             <a:pPr algn="ctr"/>
+            <a:endParaRPr/>
           </a:p>
         </p:txBody>
       </p:sp>
@@ -4919,6 +5000,7 @@
           <a:lstStyle/>
           <a:p>
             <a:pPr algn="ctr"/>
+            <a:endParaRPr/>
           </a:p>
         </p:txBody>
       </p:sp>
@@ -4939,7 +5021,7 @@
           <a:noFill/>
         </p:spPr>
         <p:txBody>
-          <a:bodyPr wrap="square" lIns="0" rIns="0" tIns="0" bIns="0" anchor="t">
+          <a:bodyPr wrap="square" lIns="0" tIns="0" rIns="0" bIns="0" anchor="t">
             <a:spAutoFit/>
           </a:bodyPr>
           <a:lstStyle/>
@@ -4974,7 +5056,7 @@
           <a:noFill/>
         </p:spPr>
         <p:txBody>
-          <a:bodyPr wrap="square" lIns="0" rIns="0" tIns="0" bIns="0" anchor="t">
+          <a:bodyPr wrap="square" lIns="0" tIns="0" rIns="0" bIns="0" anchor="t">
             <a:spAutoFit/>
           </a:bodyPr>
           <a:lstStyle/>
@@ -5009,7 +5091,7 @@
           <a:noFill/>
         </p:spPr>
         <p:txBody>
-          <a:bodyPr wrap="square" lIns="0" rIns="0" tIns="0" bIns="0" anchor="t">
+          <a:bodyPr wrap="square" lIns="0" tIns="0" rIns="0" bIns="0" anchor="t">
             <a:spAutoFit/>
           </a:bodyPr>
           <a:lstStyle/>
@@ -5070,6 +5152,7 @@
           <a:lstStyle/>
           <a:p>
             <a:pPr algn="ctr"/>
+            <a:endParaRPr/>
           </a:p>
         </p:txBody>
       </p:sp>
@@ -5113,6 +5196,7 @@
           <a:lstStyle/>
           <a:p>
             <a:pPr algn="ctr"/>
+            <a:endParaRPr/>
           </a:p>
         </p:txBody>
       </p:sp>
@@ -5133,7 +5217,7 @@
           <a:noFill/>
         </p:spPr>
         <p:txBody>
-          <a:bodyPr wrap="square" lIns="0" rIns="0" tIns="0" bIns="0" anchor="t">
+          <a:bodyPr wrap="square" lIns="0" tIns="0" rIns="0" bIns="0" anchor="t">
             <a:spAutoFit/>
           </a:bodyPr>
           <a:lstStyle/>
@@ -5168,7 +5252,7 @@
           <a:noFill/>
         </p:spPr>
         <p:txBody>
-          <a:bodyPr wrap="square" lIns="0" rIns="0" tIns="0" bIns="0" anchor="t">
+          <a:bodyPr wrap="square" lIns="0" tIns="0" rIns="0" bIns="0" anchor="t">
             <a:spAutoFit/>
           </a:bodyPr>
           <a:lstStyle/>
@@ -5203,7 +5287,7 @@
           <a:noFill/>
         </p:spPr>
         <p:txBody>
-          <a:bodyPr wrap="square" lIns="0" rIns="0" tIns="0" bIns="0" anchor="t">
+          <a:bodyPr wrap="square" lIns="0" tIns="0" rIns="0" bIns="0" anchor="t">
             <a:spAutoFit/>
           </a:bodyPr>
           <a:lstStyle/>
@@ -5239,7 +5323,7 @@
           <a:noFill/>
         </p:spPr>
         <p:txBody>
-          <a:bodyPr wrap="square" lIns="0" rIns="0" tIns="0" bIns="0" anchor="t">
+          <a:bodyPr wrap="square" lIns="0" tIns="0" rIns="0" bIns="0" anchor="t">
             <a:spAutoFit/>
           </a:bodyPr>
           <a:lstStyle/>
@@ -5274,7 +5358,7 @@
           <a:noFill/>
         </p:spPr>
         <p:txBody>
-          <a:bodyPr wrap="square" lIns="0" rIns="0" tIns="0" bIns="0" anchor="t">
+          <a:bodyPr wrap="square" lIns="0" tIns="0" rIns="0" bIns="0" anchor="t">
             <a:spAutoFit/>
           </a:bodyPr>
           <a:lstStyle/>
@@ -5301,7 +5385,7 @@
 </file>
 
 <file path=ppt/slides/slide4.xml><?xml version="1.0" encoding="utf-8"?>
-<p:sld xmlns:a="http://schemas.openxmlformats.org/drawingml/2006/main" xmlns:p="http://schemas.openxmlformats.org/presentationml/2006/main" xmlns:r="http://schemas.openxmlformats.org/officeDocument/2006/relationships">
+<p:sld xmlns:a="http://schemas.openxmlformats.org/drawingml/2006/main" xmlns:r="http://schemas.openxmlformats.org/officeDocument/2006/relationships" xmlns:p="http://schemas.openxmlformats.org/presentationml/2006/main">
   <p:cSld>
     <p:spTree>
       <p:nvGrpSpPr>
@@ -5309,7 +5393,14 @@
         <p:cNvGrpSpPr/>
         <p:nvPr/>
       </p:nvGrpSpPr>
-      <p:grpSpPr/>
+      <p:grpSpPr>
+        <a:xfrm>
+          <a:off x="0" y="0"/>
+          <a:ext cx="0" cy="0"/>
+          <a:chOff x="0" y="0"/>
+          <a:chExt cx="0" cy="0"/>
+        </a:xfrm>
+      </p:grpSpPr>
       <p:sp>
         <p:nvSpPr>
           <p:cNvPr id="2" name="Rectangle 1"/>
@@ -5351,6 +5442,7 @@
           <a:lstStyle/>
           <a:p>
             <a:pPr algn="ctr"/>
+            <a:endParaRPr/>
           </a:p>
         </p:txBody>
       </p:sp>
@@ -5394,6 +5486,7 @@
           <a:lstStyle/>
           <a:p>
             <a:pPr algn="ctr"/>
+            <a:endParaRPr/>
           </a:p>
         </p:txBody>
       </p:sp>
@@ -5405,7 +5498,7 @@
         </p:nvSpPr>
         <p:spPr>
           <a:xfrm>
-            <a:off x="822960" y="457200"/>
+            <a:off x="822960" y="551470"/>
             <a:ext cx="7315200" cy="365760"/>
           </a:xfrm>
           <a:prstGeom prst="rect">
@@ -5414,14 +5507,14 @@
           <a:noFill/>
         </p:spPr>
         <p:txBody>
-          <a:bodyPr wrap="square" lIns="0" rIns="0" tIns="0" bIns="0" anchor="t">
+          <a:bodyPr wrap="square" lIns="0" tIns="0" rIns="0" bIns="0" anchor="t">
             <a:spAutoFit/>
           </a:bodyPr>
           <a:lstStyle/>
           <a:p>
             <a:pPr algn="l"/>
             <a:r>
-              <a:rPr sz="1200" b="1" i="0">
+              <a:rPr sz="1200" b="1" i="0" dirty="0">
                 <a:solidFill>
                   <a:srgbClr val="C77DFF"/>
                 </a:solidFill>
@@ -5449,7 +5542,7 @@
           <a:noFill/>
         </p:spPr>
         <p:txBody>
-          <a:bodyPr wrap="square" lIns="0" rIns="0" tIns="0" bIns="0" anchor="t">
+          <a:bodyPr wrap="square" lIns="0" tIns="0" rIns="0" bIns="0" anchor="t">
             <a:spAutoFit/>
           </a:bodyPr>
           <a:lstStyle/>
@@ -5484,7 +5577,7 @@
           <a:noFill/>
         </p:spPr>
         <p:txBody>
-          <a:bodyPr wrap="square" lIns="0" rIns="0" tIns="0" bIns="0" anchor="t">
+          <a:bodyPr wrap="square" lIns="0" tIns="0" rIns="0" bIns="0" anchor="t">
             <a:spAutoFit/>
           </a:bodyPr>
           <a:lstStyle/>
@@ -5544,6 +5637,7 @@
           <a:lstStyle/>
           <a:p>
             <a:pPr algn="ctr"/>
+            <a:endParaRPr/>
           </a:p>
         </p:txBody>
       </p:sp>
@@ -5587,6 +5681,7 @@
           <a:lstStyle/>
           <a:p>
             <a:pPr algn="ctr"/>
+            <a:endParaRPr/>
           </a:p>
         </p:txBody>
       </p:sp>
@@ -5607,7 +5702,7 @@
           <a:noFill/>
         </p:spPr>
         <p:txBody>
-          <a:bodyPr wrap="square" lIns="0" rIns="0" tIns="0" bIns="0" anchor="t">
+          <a:bodyPr wrap="square" lIns="0" tIns="0" rIns="0" bIns="0" anchor="t">
             <a:spAutoFit/>
           </a:bodyPr>
           <a:lstStyle/>
@@ -5642,7 +5737,7 @@
           <a:noFill/>
         </p:spPr>
         <p:txBody>
-          <a:bodyPr wrap="square" lIns="0" rIns="0" tIns="0" bIns="0" anchor="t">
+          <a:bodyPr wrap="square" lIns="0" tIns="0" rIns="0" bIns="0" anchor="t">
             <a:spAutoFit/>
           </a:bodyPr>
           <a:lstStyle/>
@@ -5677,7 +5772,7 @@
           <a:noFill/>
         </p:spPr>
         <p:txBody>
-          <a:bodyPr wrap="square" lIns="0" rIns="0" tIns="0" bIns="0" anchor="t">
+          <a:bodyPr wrap="square" lIns="0" tIns="0" rIns="0" bIns="0" anchor="t">
             <a:spAutoFit/>
           </a:bodyPr>
           <a:lstStyle/>
@@ -5737,6 +5832,7 @@
           <a:lstStyle/>
           <a:p>
             <a:pPr algn="ctr"/>
+            <a:endParaRPr/>
           </a:p>
         </p:txBody>
       </p:sp>
@@ -5780,6 +5876,7 @@
           <a:lstStyle/>
           <a:p>
             <a:pPr algn="ctr"/>
+            <a:endParaRPr/>
           </a:p>
         </p:txBody>
       </p:sp>
@@ -5800,7 +5897,7 @@
           <a:noFill/>
         </p:spPr>
         <p:txBody>
-          <a:bodyPr wrap="square" lIns="0" rIns="0" tIns="0" bIns="0" anchor="t">
+          <a:bodyPr wrap="square" lIns="0" tIns="0" rIns="0" bIns="0" anchor="t">
             <a:spAutoFit/>
           </a:bodyPr>
           <a:lstStyle/>
@@ -5835,7 +5932,7 @@
           <a:noFill/>
         </p:spPr>
         <p:txBody>
-          <a:bodyPr wrap="square" lIns="0" rIns="0" tIns="0" bIns="0" anchor="t">
+          <a:bodyPr wrap="square" lIns="0" tIns="0" rIns="0" bIns="0" anchor="t">
             <a:spAutoFit/>
           </a:bodyPr>
           <a:lstStyle/>
@@ -5870,7 +5967,7 @@
           <a:noFill/>
         </p:spPr>
         <p:txBody>
-          <a:bodyPr wrap="square" lIns="0" rIns="0" tIns="0" bIns="0" anchor="t">
+          <a:bodyPr wrap="square" lIns="0" tIns="0" rIns="0" bIns="0" anchor="t">
             <a:spAutoFit/>
           </a:bodyPr>
           <a:lstStyle/>
@@ -5930,6 +6027,7 @@
           <a:lstStyle/>
           <a:p>
             <a:pPr algn="ctr"/>
+            <a:endParaRPr/>
           </a:p>
         </p:txBody>
       </p:sp>
@@ -5973,6 +6071,7 @@
           <a:lstStyle/>
           <a:p>
             <a:pPr algn="ctr"/>
+            <a:endParaRPr/>
           </a:p>
         </p:txBody>
       </p:sp>
@@ -5993,7 +6092,7 @@
           <a:noFill/>
         </p:spPr>
         <p:txBody>
-          <a:bodyPr wrap="square" lIns="0" rIns="0" tIns="0" bIns="0" anchor="t">
+          <a:bodyPr wrap="square" lIns="0" tIns="0" rIns="0" bIns="0" anchor="t">
             <a:spAutoFit/>
           </a:bodyPr>
           <a:lstStyle/>
@@ -6028,7 +6127,7 @@
           <a:noFill/>
         </p:spPr>
         <p:txBody>
-          <a:bodyPr wrap="square" lIns="0" rIns="0" tIns="0" bIns="0" anchor="t">
+          <a:bodyPr wrap="square" lIns="0" tIns="0" rIns="0" bIns="0" anchor="t">
             <a:spAutoFit/>
           </a:bodyPr>
           <a:lstStyle/>
@@ -6063,7 +6162,7 @@
           <a:noFill/>
         </p:spPr>
         <p:txBody>
-          <a:bodyPr wrap="square" lIns="0" rIns="0" tIns="0" bIns="0" anchor="t">
+          <a:bodyPr wrap="square" lIns="0" tIns="0" rIns="0" bIns="0" anchor="t">
             <a:spAutoFit/>
           </a:bodyPr>
           <a:lstStyle/>
@@ -6098,7 +6197,7 @@
           <a:noFill/>
         </p:spPr>
         <p:txBody>
-          <a:bodyPr wrap="square" lIns="0" rIns="0" tIns="0" bIns="0" anchor="t">
+          <a:bodyPr wrap="square" lIns="0" tIns="0" rIns="0" bIns="0" anchor="t">
             <a:spAutoFit/>
           </a:bodyPr>
           <a:lstStyle/>
@@ -6125,7 +6224,7 @@
 </file>
 
 <file path=ppt/slides/slide5.xml><?xml version="1.0" encoding="utf-8"?>
-<p:sld xmlns:a="http://schemas.openxmlformats.org/drawingml/2006/main" xmlns:p="http://schemas.openxmlformats.org/presentationml/2006/main" xmlns:r="http://schemas.openxmlformats.org/officeDocument/2006/relationships">
+<p:sld xmlns:a="http://schemas.openxmlformats.org/drawingml/2006/main" xmlns:r="http://schemas.openxmlformats.org/officeDocument/2006/relationships" xmlns:p="http://schemas.openxmlformats.org/presentationml/2006/main">
   <p:cSld>
     <p:spTree>
       <p:nvGrpSpPr>
@@ -6133,7 +6232,14 @@
         <p:cNvGrpSpPr/>
         <p:nvPr/>
       </p:nvGrpSpPr>
-      <p:grpSpPr/>
+      <p:grpSpPr>
+        <a:xfrm>
+          <a:off x="0" y="0"/>
+          <a:ext cx="0" cy="0"/>
+          <a:chOff x="0" y="0"/>
+          <a:chExt cx="0" cy="0"/>
+        </a:xfrm>
+      </p:grpSpPr>
       <p:sp>
         <p:nvSpPr>
           <p:cNvPr id="2" name="Rectangle 1"/>
@@ -6175,6 +6281,7 @@
           <a:lstStyle/>
           <a:p>
             <a:pPr algn="ctr"/>
+            <a:endParaRPr/>
           </a:p>
         </p:txBody>
       </p:sp>
@@ -6218,6 +6325,7 @@
           <a:lstStyle/>
           <a:p>
             <a:pPr algn="ctr"/>
+            <a:endParaRPr/>
           </a:p>
         </p:txBody>
       </p:sp>
@@ -6229,7 +6337,7 @@
         </p:nvSpPr>
         <p:spPr>
           <a:xfrm>
-            <a:off x="822960" y="457200"/>
+            <a:off x="822960" y="551470"/>
             <a:ext cx="7315200" cy="365760"/>
           </a:xfrm>
           <a:prstGeom prst="rect">
@@ -6238,14 +6346,14 @@
           <a:noFill/>
         </p:spPr>
         <p:txBody>
-          <a:bodyPr wrap="square" lIns="0" rIns="0" tIns="0" bIns="0" anchor="t">
+          <a:bodyPr wrap="square" lIns="0" tIns="0" rIns="0" bIns="0" anchor="t">
             <a:spAutoFit/>
           </a:bodyPr>
           <a:lstStyle/>
           <a:p>
             <a:pPr algn="l"/>
             <a:r>
-              <a:rPr sz="1200" b="1" i="0">
+              <a:rPr sz="1200" b="1" i="0" dirty="0">
                 <a:solidFill>
                   <a:srgbClr val="C77DFF"/>
                 </a:solidFill>
@@ -6273,7 +6381,7 @@
           <a:noFill/>
         </p:spPr>
         <p:txBody>
-          <a:bodyPr wrap="square" lIns="0" rIns="0" tIns="0" bIns="0" anchor="t">
+          <a:bodyPr wrap="square" lIns="0" tIns="0" rIns="0" bIns="0" anchor="t">
             <a:spAutoFit/>
           </a:bodyPr>
           <a:lstStyle/>
@@ -6300,28 +6408,64 @@
         <p:spPr>
           <a:xfrm>
             <a:off x="640080" y="1783080"/>
-            <a:ext cx="10058400" cy="457200"/>
-          </a:xfrm>
-          <a:prstGeom prst="rect">
-            <a:avLst/>
-          </a:prstGeom>
-          <a:noFill/>
-        </p:spPr>
-        <p:txBody>
-          <a:bodyPr wrap="square" lIns="0" rIns="0" tIns="0" bIns="0" anchor="t">
+            <a:ext cx="10058400" cy="230832"/>
+          </a:xfrm>
+          <a:prstGeom prst="rect">
+            <a:avLst/>
+          </a:prstGeom>
+          <a:noFill/>
+        </p:spPr>
+        <p:txBody>
+          <a:bodyPr wrap="square" lIns="0" tIns="0" rIns="0" bIns="0" anchor="t">
             <a:spAutoFit/>
           </a:bodyPr>
           <a:lstStyle/>
           <a:p>
             <a:pPr algn="l"/>
             <a:r>
-              <a:rPr sz="1500" b="0" i="1">
+              <a:rPr sz="1500" b="0" i="1" dirty="0" err="1">
                 <a:solidFill>
                   <a:srgbClr val="C77DFF"/>
                 </a:solidFill>
                 <a:latin typeface="Calibri"/>
               </a:rPr>
-              <a:t>Schlank, modern und auf den Free-Tier abgestimmt.</a:t>
+              <a:t>Schlank</a:t>
+            </a:r>
+            <a:r>
+              <a:rPr sz="1500" b="0" i="1" dirty="0">
+                <a:solidFill>
+                  <a:srgbClr val="C77DFF"/>
+                </a:solidFill>
+                <a:latin typeface="Calibri"/>
+              </a:rPr>
+              <a:t>, modern und </a:t>
+            </a:r>
+            <a:r>
+              <a:rPr lang="de-DE" sz="1500" b="0" i="1" dirty="0">
+                <a:solidFill>
+                  <a:srgbClr val="C77DFF"/>
+                </a:solidFill>
+                <a:latin typeface="Calibri"/>
+              </a:rPr>
+              <a:t>aufs kostenlose Hosting </a:t>
+            </a:r>
+            <a:r>
+              <a:rPr sz="1500" b="0" i="1" dirty="0" err="1">
+                <a:solidFill>
+                  <a:srgbClr val="C77DFF"/>
+                </a:solidFill>
+                <a:latin typeface="Calibri"/>
+              </a:rPr>
+              <a:t>abgestimmt</a:t>
+            </a:r>
+            <a:r>
+              <a:rPr sz="1500" b="0" i="1" dirty="0">
+                <a:solidFill>
+                  <a:srgbClr val="C77DFF"/>
+                </a:solidFill>
+                <a:latin typeface="Calibri"/>
+              </a:rPr>
+              <a:t>.</a:t>
             </a:r>
           </a:p>
         </p:txBody>
@@ -6368,6 +6512,7 @@
           <a:lstStyle/>
           <a:p>
             <a:pPr algn="ctr"/>
+            <a:endParaRPr/>
           </a:p>
         </p:txBody>
       </p:sp>
@@ -6411,6 +6556,7 @@
           <a:lstStyle/>
           <a:p>
             <a:pPr algn="ctr"/>
+            <a:endParaRPr/>
           </a:p>
         </p:txBody>
       </p:sp>
@@ -6431,7 +6577,7 @@
           <a:noFill/>
         </p:spPr>
         <p:txBody>
-          <a:bodyPr wrap="square" lIns="0" rIns="0" tIns="0" bIns="0" anchor="t">
+          <a:bodyPr wrap="square" lIns="0" tIns="0" rIns="0" bIns="0" anchor="t">
             <a:spAutoFit/>
           </a:bodyPr>
           <a:lstStyle/>
@@ -6466,7 +6612,7 @@
           <a:noFill/>
         </p:spPr>
         <p:txBody>
-          <a:bodyPr wrap="square" lIns="0" rIns="0" tIns="0" bIns="0" anchor="t">
+          <a:bodyPr wrap="square" lIns="0" tIns="0" rIns="0" bIns="0" anchor="t">
             <a:spAutoFit/>
           </a:bodyPr>
           <a:lstStyle/>
@@ -6501,7 +6647,7 @@
           <a:noFill/>
         </p:spPr>
         <p:txBody>
-          <a:bodyPr wrap="square" lIns="0" rIns="0" tIns="0" bIns="0" anchor="t">
+          <a:bodyPr wrap="square" lIns="0" tIns="0" rIns="0" bIns="0" anchor="t">
             <a:spAutoFit/>
           </a:bodyPr>
           <a:lstStyle/>
@@ -6561,6 +6707,7 @@
           <a:lstStyle/>
           <a:p>
             <a:pPr algn="ctr"/>
+            <a:endParaRPr/>
           </a:p>
         </p:txBody>
       </p:sp>
@@ -6604,6 +6751,7 @@
           <a:lstStyle/>
           <a:p>
             <a:pPr algn="ctr"/>
+            <a:endParaRPr/>
           </a:p>
         </p:txBody>
       </p:sp>
@@ -6624,7 +6772,7 @@
           <a:noFill/>
         </p:spPr>
         <p:txBody>
-          <a:bodyPr wrap="square" lIns="0" rIns="0" tIns="0" bIns="0" anchor="t">
+          <a:bodyPr wrap="square" lIns="0" tIns="0" rIns="0" bIns="0" anchor="t">
             <a:spAutoFit/>
           </a:bodyPr>
           <a:lstStyle/>
@@ -6659,7 +6807,7 @@
           <a:noFill/>
         </p:spPr>
         <p:txBody>
-          <a:bodyPr wrap="square" lIns="0" rIns="0" tIns="0" bIns="0" anchor="t">
+          <a:bodyPr wrap="square" lIns="0" tIns="0" rIns="0" bIns="0" anchor="t">
             <a:spAutoFit/>
           </a:bodyPr>
           <a:lstStyle/>
@@ -6694,7 +6842,7 @@
           <a:noFill/>
         </p:spPr>
         <p:txBody>
-          <a:bodyPr wrap="square" lIns="0" rIns="0" tIns="0" bIns="0" anchor="t">
+          <a:bodyPr wrap="square" lIns="0" tIns="0" rIns="0" bIns="0" anchor="t">
             <a:spAutoFit/>
           </a:bodyPr>
           <a:lstStyle/>
@@ -6754,6 +6902,7 @@
           <a:lstStyle/>
           <a:p>
             <a:pPr algn="ctr"/>
+            <a:endParaRPr/>
           </a:p>
         </p:txBody>
       </p:sp>
@@ -6797,6 +6946,7 @@
           <a:lstStyle/>
           <a:p>
             <a:pPr algn="ctr"/>
+            <a:endParaRPr/>
           </a:p>
         </p:txBody>
       </p:sp>
@@ -6817,7 +6967,7 @@
           <a:noFill/>
         </p:spPr>
         <p:txBody>
-          <a:bodyPr wrap="square" lIns="0" rIns="0" tIns="0" bIns="0" anchor="t">
+          <a:bodyPr wrap="square" lIns="0" tIns="0" rIns="0" bIns="0" anchor="t">
             <a:spAutoFit/>
           </a:bodyPr>
           <a:lstStyle/>
@@ -6852,7 +7002,7 @@
           <a:noFill/>
         </p:spPr>
         <p:txBody>
-          <a:bodyPr wrap="square" lIns="0" rIns="0" tIns="0" bIns="0" anchor="t">
+          <a:bodyPr wrap="square" lIns="0" tIns="0" rIns="0" bIns="0" anchor="t">
             <a:spAutoFit/>
           </a:bodyPr>
           <a:lstStyle/>
@@ -6887,7 +7037,7 @@
           <a:noFill/>
         </p:spPr>
         <p:txBody>
-          <a:bodyPr wrap="square" lIns="0" rIns="0" tIns="0" bIns="0" anchor="t">
+          <a:bodyPr wrap="square" lIns="0" tIns="0" rIns="0" bIns="0" anchor="t">
             <a:spAutoFit/>
           </a:bodyPr>
           <a:lstStyle/>
@@ -6947,6 +7097,7 @@
           <a:lstStyle/>
           <a:p>
             <a:pPr algn="ctr"/>
+            <a:endParaRPr/>
           </a:p>
         </p:txBody>
       </p:sp>
@@ -6990,6 +7141,7 @@
           <a:lstStyle/>
           <a:p>
             <a:pPr algn="ctr"/>
+            <a:endParaRPr/>
           </a:p>
         </p:txBody>
       </p:sp>
@@ -7010,7 +7162,7 @@
           <a:noFill/>
         </p:spPr>
         <p:txBody>
-          <a:bodyPr wrap="square" lIns="0" rIns="0" tIns="0" bIns="0" anchor="t">
+          <a:bodyPr wrap="square" lIns="0" tIns="0" rIns="0" bIns="0" anchor="t">
             <a:spAutoFit/>
           </a:bodyPr>
           <a:lstStyle/>
@@ -7045,7 +7197,7 @@
           <a:noFill/>
         </p:spPr>
         <p:txBody>
-          <a:bodyPr wrap="square" lIns="0" rIns="0" tIns="0" bIns="0" anchor="t">
+          <a:bodyPr wrap="square" lIns="0" tIns="0" rIns="0" bIns="0" anchor="t">
             <a:spAutoFit/>
           </a:bodyPr>
           <a:lstStyle/>
@@ -7080,7 +7232,7 @@
           <a:noFill/>
         </p:spPr>
         <p:txBody>
-          <a:bodyPr wrap="square" lIns="0" rIns="0" tIns="0" bIns="0" anchor="t">
+          <a:bodyPr wrap="square" lIns="0" tIns="0" rIns="0" bIns="0" anchor="t">
             <a:spAutoFit/>
           </a:bodyPr>
           <a:lstStyle/>
@@ -7140,6 +7292,7 @@
           <a:lstStyle/>
           <a:p>
             <a:pPr algn="ctr"/>
+            <a:endParaRPr/>
           </a:p>
         </p:txBody>
       </p:sp>
@@ -7183,6 +7336,7 @@
           <a:lstStyle/>
           <a:p>
             <a:pPr algn="ctr"/>
+            <a:endParaRPr/>
           </a:p>
         </p:txBody>
       </p:sp>
@@ -7203,7 +7357,7 @@
           <a:noFill/>
         </p:spPr>
         <p:txBody>
-          <a:bodyPr wrap="square" lIns="0" rIns="0" tIns="0" bIns="0" anchor="t">
+          <a:bodyPr wrap="square" lIns="0" tIns="0" rIns="0" bIns="0" anchor="t">
             <a:spAutoFit/>
           </a:bodyPr>
           <a:lstStyle/>
@@ -7238,7 +7392,7 @@
           <a:noFill/>
         </p:spPr>
         <p:txBody>
-          <a:bodyPr wrap="square" lIns="0" rIns="0" tIns="0" bIns="0" anchor="t">
+          <a:bodyPr wrap="square" lIns="0" tIns="0" rIns="0" bIns="0" anchor="t">
             <a:spAutoFit/>
           </a:bodyPr>
           <a:lstStyle/>
@@ -7273,7 +7427,7 @@
           <a:noFill/>
         </p:spPr>
         <p:txBody>
-          <a:bodyPr wrap="square" lIns="0" rIns="0" tIns="0" bIns="0" anchor="t">
+          <a:bodyPr wrap="square" lIns="0" tIns="0" rIns="0" bIns="0" anchor="t">
             <a:spAutoFit/>
           </a:bodyPr>
           <a:lstStyle/>
@@ -7333,6 +7487,7 @@
           <a:lstStyle/>
           <a:p>
             <a:pPr algn="ctr"/>
+            <a:endParaRPr/>
           </a:p>
         </p:txBody>
       </p:sp>
@@ -7376,6 +7531,7 @@
           <a:lstStyle/>
           <a:p>
             <a:pPr algn="ctr"/>
+            <a:endParaRPr/>
           </a:p>
         </p:txBody>
       </p:sp>
@@ -7396,7 +7552,7 @@
           <a:noFill/>
         </p:spPr>
         <p:txBody>
-          <a:bodyPr wrap="square" lIns="0" rIns="0" tIns="0" bIns="0" anchor="t">
+          <a:bodyPr wrap="square" lIns="0" tIns="0" rIns="0" bIns="0" anchor="t">
             <a:spAutoFit/>
           </a:bodyPr>
           <a:lstStyle/>
@@ -7431,7 +7587,7 @@
           <a:noFill/>
         </p:spPr>
         <p:txBody>
-          <a:bodyPr wrap="square" lIns="0" rIns="0" tIns="0" bIns="0" anchor="t">
+          <a:bodyPr wrap="square" lIns="0" tIns="0" rIns="0" bIns="0" anchor="t">
             <a:spAutoFit/>
           </a:bodyPr>
           <a:lstStyle/>
@@ -7466,7 +7622,7 @@
           <a:noFill/>
         </p:spPr>
         <p:txBody>
-          <a:bodyPr wrap="square" lIns="0" rIns="0" tIns="0" bIns="0" anchor="t">
+          <a:bodyPr wrap="square" lIns="0" tIns="0" rIns="0" bIns="0" anchor="t">
             <a:spAutoFit/>
           </a:bodyPr>
           <a:lstStyle/>
@@ -7501,7 +7657,7 @@
           <a:noFill/>
         </p:spPr>
         <p:txBody>
-          <a:bodyPr wrap="square" lIns="0" rIns="0" tIns="0" bIns="0" anchor="t">
+          <a:bodyPr wrap="square" lIns="0" tIns="0" rIns="0" bIns="0" anchor="t">
             <a:spAutoFit/>
           </a:bodyPr>
           <a:lstStyle/>
@@ -7528,7 +7684,7 @@
 </file>
 
 <file path=ppt/slides/slide6.xml><?xml version="1.0" encoding="utf-8"?>
-<p:sld xmlns:a="http://schemas.openxmlformats.org/drawingml/2006/main" xmlns:p="http://schemas.openxmlformats.org/presentationml/2006/main" xmlns:r="http://schemas.openxmlformats.org/officeDocument/2006/relationships">
+<p:sld xmlns:a="http://schemas.openxmlformats.org/drawingml/2006/main" xmlns:r="http://schemas.openxmlformats.org/officeDocument/2006/relationships" xmlns:p="http://schemas.openxmlformats.org/presentationml/2006/main">
   <p:cSld>
     <p:spTree>
       <p:nvGrpSpPr>
@@ -7536,7 +7692,14 @@
         <p:cNvGrpSpPr/>
         <p:nvPr/>
       </p:nvGrpSpPr>
-      <p:grpSpPr/>
+      <p:grpSpPr>
+        <a:xfrm>
+          <a:off x="0" y="0"/>
+          <a:ext cx="0" cy="0"/>
+          <a:chOff x="0" y="0"/>
+          <a:chExt cx="0" cy="0"/>
+        </a:xfrm>
+      </p:grpSpPr>
       <p:sp>
         <p:nvSpPr>
           <p:cNvPr id="2" name="Rectangle 1"/>
@@ -7578,6 +7741,7 @@
           <a:lstStyle/>
           <a:p>
             <a:pPr algn="ctr"/>
+            <a:endParaRPr/>
           </a:p>
         </p:txBody>
       </p:sp>
@@ -7621,6 +7785,7 @@
           <a:lstStyle/>
           <a:p>
             <a:pPr algn="ctr"/>
+            <a:endParaRPr/>
           </a:p>
         </p:txBody>
       </p:sp>
@@ -7641,7 +7806,7 @@
           <a:noFill/>
         </p:spPr>
         <p:txBody>
-          <a:bodyPr wrap="square" lIns="0" rIns="0" tIns="0" bIns="0" anchor="t">
+          <a:bodyPr wrap="square" lIns="0" tIns="0" rIns="0" bIns="0" anchor="t">
             <a:spAutoFit/>
           </a:bodyPr>
           <a:lstStyle/>
@@ -7676,7 +7841,7 @@
           <a:noFill/>
         </p:spPr>
         <p:txBody>
-          <a:bodyPr wrap="square" lIns="0" rIns="0" tIns="0" bIns="0" anchor="t">
+          <a:bodyPr wrap="square" lIns="0" tIns="0" rIns="0" bIns="0" anchor="t">
             <a:spAutoFit/>
           </a:bodyPr>
           <a:lstStyle/>
@@ -7735,7 +7900,7 @@
           <a:noFill/>
         </p:spPr>
         <p:txBody>
-          <a:bodyPr wrap="square" lIns="0" rIns="0" tIns="0" bIns="0" anchor="t">
+          <a:bodyPr wrap="square" lIns="0" tIns="0" rIns="0" bIns="0" anchor="t">
             <a:spAutoFit/>
           </a:bodyPr>
           <a:lstStyle/>
@@ -7770,7 +7935,7 @@
           <a:noFill/>
         </p:spPr>
         <p:txBody>
-          <a:bodyPr wrap="square" lIns="0" rIns="0" tIns="0" bIns="0" anchor="t">
+          <a:bodyPr wrap="square" lIns="0" tIns="0" rIns="0" bIns="0" anchor="t">
             <a:spAutoFit/>
           </a:bodyPr>
           <a:lstStyle/>
@@ -7797,7 +7962,7 @@
 </file>
 
 <file path=ppt/slides/slide7.xml><?xml version="1.0" encoding="utf-8"?>
-<p:sld xmlns:a="http://schemas.openxmlformats.org/drawingml/2006/main" xmlns:p="http://schemas.openxmlformats.org/presentationml/2006/main" xmlns:r="http://schemas.openxmlformats.org/officeDocument/2006/relationships">
+<p:sld xmlns:a="http://schemas.openxmlformats.org/drawingml/2006/main" xmlns:r="http://schemas.openxmlformats.org/officeDocument/2006/relationships" xmlns:p="http://schemas.openxmlformats.org/presentationml/2006/main">
   <p:cSld>
     <p:spTree>
       <p:nvGrpSpPr>
@@ -7805,7 +7970,14 @@
         <p:cNvGrpSpPr/>
         <p:nvPr/>
       </p:nvGrpSpPr>
-      <p:grpSpPr/>
+      <p:grpSpPr>
+        <a:xfrm>
+          <a:off x="0" y="0"/>
+          <a:ext cx="0" cy="0"/>
+          <a:chOff x="0" y="0"/>
+          <a:chExt cx="0" cy="0"/>
+        </a:xfrm>
+      </p:grpSpPr>
       <p:sp>
         <p:nvSpPr>
           <p:cNvPr id="2" name="Rectangle 1"/>
@@ -7847,6 +8019,7 @@
           <a:lstStyle/>
           <a:p>
             <a:pPr algn="ctr"/>
+            <a:endParaRPr/>
           </a:p>
         </p:txBody>
       </p:sp>
@@ -7890,6 +8063,7 @@
           <a:lstStyle/>
           <a:p>
             <a:pPr algn="ctr"/>
+            <a:endParaRPr/>
           </a:p>
         </p:txBody>
       </p:sp>
@@ -7901,7 +8075,7 @@
         </p:nvSpPr>
         <p:spPr>
           <a:xfrm>
-            <a:off x="960120" y="548640"/>
+            <a:off x="960120" y="652336"/>
             <a:ext cx="2743200" cy="365760"/>
           </a:xfrm>
           <a:prstGeom prst="rect">
@@ -7910,14 +8084,14 @@
           <a:noFill/>
         </p:spPr>
         <p:txBody>
-          <a:bodyPr wrap="square" lIns="0" rIns="0" tIns="0" bIns="0" anchor="t">
+          <a:bodyPr wrap="square" lIns="0" tIns="0" rIns="0" bIns="0" anchor="t">
             <a:spAutoFit/>
           </a:bodyPr>
           <a:lstStyle/>
           <a:p>
             <a:pPr algn="l"/>
             <a:r>
-              <a:rPr sz="1200" b="1" i="0">
+              <a:rPr sz="1200" b="1" i="0" dirty="0">
                 <a:solidFill>
                   <a:srgbClr val="FFFFFF"/>
                 </a:solidFill>
@@ -7945,7 +8119,7 @@
           <a:noFill/>
         </p:spPr>
         <p:txBody>
-          <a:bodyPr wrap="square" lIns="0" rIns="0" tIns="0" bIns="0" anchor="t">
+          <a:bodyPr wrap="square" lIns="0" tIns="0" rIns="0" bIns="0" anchor="t">
             <a:spAutoFit/>
           </a:bodyPr>
           <a:lstStyle/>
@@ -7981,7 +8155,7 @@
           <a:noFill/>
         </p:spPr>
         <p:txBody>
-          <a:bodyPr wrap="square" lIns="0" rIns="0" tIns="0" bIns="0" anchor="t">
+          <a:bodyPr wrap="square" lIns="0" tIns="0" rIns="0" bIns="0" anchor="t">
             <a:spAutoFit/>
           </a:bodyPr>
           <a:lstStyle/>
@@ -8041,6 +8215,7 @@
           <a:lstStyle/>
           <a:p>
             <a:pPr algn="ctr"/>
+            <a:endParaRPr/>
           </a:p>
         </p:txBody>
       </p:sp>
@@ -8084,6 +8259,7 @@
           <a:lstStyle/>
           <a:p>
             <a:pPr algn="ctr"/>
+            <a:endParaRPr/>
           </a:p>
         </p:txBody>
       </p:sp>
@@ -8104,7 +8280,7 @@
           <a:noFill/>
         </p:spPr>
         <p:txBody>
-          <a:bodyPr wrap="square" lIns="0" rIns="0" tIns="0" bIns="0" anchor="t">
+          <a:bodyPr wrap="square" lIns="0" tIns="0" rIns="0" bIns="0" anchor="t">
             <a:spAutoFit/>
           </a:bodyPr>
           <a:lstStyle/>
@@ -8139,7 +8315,7 @@
           <a:noFill/>
         </p:spPr>
         <p:txBody>
-          <a:bodyPr wrap="square" lIns="0" rIns="0" tIns="0" bIns="0" anchor="t">
+          <a:bodyPr wrap="square" lIns="0" tIns="0" rIns="0" bIns="0" anchor="t">
             <a:spAutoFit/>
           </a:bodyPr>
           <a:lstStyle/>
@@ -8174,7 +8350,7 @@
           <a:noFill/>
         </p:spPr>
         <p:txBody>
-          <a:bodyPr wrap="square" lIns="0" rIns="0" tIns="0" bIns="0" anchor="t">
+          <a:bodyPr wrap="square" lIns="0" tIns="0" rIns="0" bIns="0" anchor="t">
             <a:spAutoFit/>
           </a:bodyPr>
           <a:lstStyle/>
@@ -8234,6 +8410,7 @@
           <a:lstStyle/>
           <a:p>
             <a:pPr algn="ctr"/>
+            <a:endParaRPr/>
           </a:p>
         </p:txBody>
       </p:sp>
@@ -8277,6 +8454,7 @@
           <a:lstStyle/>
           <a:p>
             <a:pPr algn="ctr"/>
+            <a:endParaRPr/>
           </a:p>
         </p:txBody>
       </p:sp>
@@ -8297,7 +8475,7 @@
           <a:noFill/>
         </p:spPr>
         <p:txBody>
-          <a:bodyPr wrap="square" lIns="0" rIns="0" tIns="0" bIns="0" anchor="t">
+          <a:bodyPr wrap="square" lIns="0" tIns="0" rIns="0" bIns="0" anchor="t">
             <a:spAutoFit/>
           </a:bodyPr>
           <a:lstStyle/>
@@ -8332,7 +8510,7 @@
           <a:noFill/>
         </p:spPr>
         <p:txBody>
-          <a:bodyPr wrap="square" lIns="0" rIns="0" tIns="0" bIns="0" anchor="t">
+          <a:bodyPr wrap="square" lIns="0" tIns="0" rIns="0" bIns="0" anchor="t">
             <a:spAutoFit/>
           </a:bodyPr>
           <a:lstStyle/>
@@ -8367,7 +8545,7 @@
           <a:noFill/>
         </p:spPr>
         <p:txBody>
-          <a:bodyPr wrap="square" lIns="0" rIns="0" tIns="0" bIns="0" anchor="t">
+          <a:bodyPr wrap="square" lIns="0" tIns="0" rIns="0" bIns="0" anchor="t">
             <a:spAutoFit/>
           </a:bodyPr>
           <a:lstStyle/>
@@ -8427,6 +8605,7 @@
           <a:lstStyle/>
           <a:p>
             <a:pPr algn="ctr"/>
+            <a:endParaRPr/>
           </a:p>
         </p:txBody>
       </p:sp>
@@ -8470,6 +8649,7 @@
           <a:lstStyle/>
           <a:p>
             <a:pPr algn="ctr"/>
+            <a:endParaRPr/>
           </a:p>
         </p:txBody>
       </p:sp>
@@ -8490,7 +8670,7 @@
           <a:noFill/>
         </p:spPr>
         <p:txBody>
-          <a:bodyPr wrap="square" lIns="0" rIns="0" tIns="0" bIns="0" anchor="t">
+          <a:bodyPr wrap="square" lIns="0" tIns="0" rIns="0" bIns="0" anchor="t">
             <a:spAutoFit/>
           </a:bodyPr>
           <a:lstStyle/>
@@ -8525,7 +8705,7 @@
           <a:noFill/>
         </p:spPr>
         <p:txBody>
-          <a:bodyPr wrap="square" lIns="0" rIns="0" tIns="0" bIns="0" anchor="t">
+          <a:bodyPr wrap="square" lIns="0" tIns="0" rIns="0" bIns="0" anchor="t">
             <a:spAutoFit/>
           </a:bodyPr>
           <a:lstStyle/>
@@ -8560,7 +8740,7 @@
           <a:noFill/>
         </p:spPr>
         <p:txBody>
-          <a:bodyPr wrap="square" lIns="0" rIns="0" tIns="0" bIns="0" anchor="t">
+          <a:bodyPr wrap="square" lIns="0" tIns="0" rIns="0" bIns="0" anchor="t">
             <a:spAutoFit/>
           </a:bodyPr>
           <a:lstStyle/>
@@ -8620,6 +8800,7 @@
           <a:lstStyle/>
           <a:p>
             <a:pPr algn="ctr"/>
+            <a:endParaRPr/>
           </a:p>
         </p:txBody>
       </p:sp>
@@ -8663,6 +8844,7 @@
           <a:lstStyle/>
           <a:p>
             <a:pPr algn="ctr"/>
+            <a:endParaRPr/>
           </a:p>
         </p:txBody>
       </p:sp>
@@ -8683,7 +8865,7 @@
           <a:noFill/>
         </p:spPr>
         <p:txBody>
-          <a:bodyPr wrap="square" lIns="0" rIns="0" tIns="0" bIns="0" anchor="t">
+          <a:bodyPr wrap="square" lIns="0" tIns="0" rIns="0" bIns="0" anchor="t">
             <a:spAutoFit/>
           </a:bodyPr>
           <a:lstStyle/>
@@ -8718,7 +8900,7 @@
           <a:noFill/>
         </p:spPr>
         <p:txBody>
-          <a:bodyPr wrap="square" lIns="0" rIns="0" tIns="0" bIns="0" anchor="t">
+          <a:bodyPr wrap="square" lIns="0" tIns="0" rIns="0" bIns="0" anchor="t">
             <a:spAutoFit/>
           </a:bodyPr>
           <a:lstStyle/>
@@ -8753,7 +8935,7 @@
           <a:noFill/>
         </p:spPr>
         <p:txBody>
-          <a:bodyPr wrap="square" lIns="0" rIns="0" tIns="0" bIns="0" anchor="t">
+          <a:bodyPr wrap="square" lIns="0" tIns="0" rIns="0" bIns="0" anchor="t">
             <a:spAutoFit/>
           </a:bodyPr>
           <a:lstStyle/>
@@ -8813,6 +8995,7 @@
           <a:lstStyle/>
           <a:p>
             <a:pPr algn="ctr"/>
+            <a:endParaRPr/>
           </a:p>
         </p:txBody>
       </p:sp>
@@ -8856,6 +9039,7 @@
           <a:lstStyle/>
           <a:p>
             <a:pPr algn="ctr"/>
+            <a:endParaRPr/>
           </a:p>
         </p:txBody>
       </p:sp>
@@ -8876,7 +9060,7 @@
           <a:noFill/>
         </p:spPr>
         <p:txBody>
-          <a:bodyPr wrap="square" lIns="0" rIns="0" tIns="0" bIns="0" anchor="t">
+          <a:bodyPr wrap="square" lIns="0" tIns="0" rIns="0" bIns="0" anchor="t">
             <a:spAutoFit/>
           </a:bodyPr>
           <a:lstStyle/>
@@ -8911,7 +9095,7 @@
           <a:noFill/>
         </p:spPr>
         <p:txBody>
-          <a:bodyPr wrap="square" lIns="0" rIns="0" tIns="0" bIns="0" anchor="t">
+          <a:bodyPr wrap="square" lIns="0" tIns="0" rIns="0" bIns="0" anchor="t">
             <a:spAutoFit/>
           </a:bodyPr>
           <a:lstStyle/>
@@ -8946,7 +9130,7 @@
           <a:noFill/>
         </p:spPr>
         <p:txBody>
-          <a:bodyPr wrap="square" lIns="0" rIns="0" tIns="0" bIns="0" anchor="t">
+          <a:bodyPr wrap="square" lIns="0" tIns="0" rIns="0" bIns="0" anchor="t">
             <a:spAutoFit/>
           </a:bodyPr>
           <a:lstStyle/>
@@ -9006,6 +9190,7 @@
           <a:lstStyle/>
           <a:p>
             <a:pPr algn="ctr"/>
+            <a:endParaRPr/>
           </a:p>
         </p:txBody>
       </p:sp>
@@ -9049,6 +9234,7 @@
           <a:lstStyle/>
           <a:p>
             <a:pPr algn="ctr"/>
+            <a:endParaRPr/>
           </a:p>
         </p:txBody>
       </p:sp>
@@ -9069,7 +9255,7 @@
           <a:noFill/>
         </p:spPr>
         <p:txBody>
-          <a:bodyPr wrap="square" lIns="0" rIns="0" tIns="0" bIns="0" anchor="t">
+          <a:bodyPr wrap="square" lIns="0" tIns="0" rIns="0" bIns="0" anchor="t">
             <a:spAutoFit/>
           </a:bodyPr>
           <a:lstStyle/>
@@ -9104,7 +9290,7 @@
           <a:noFill/>
         </p:spPr>
         <p:txBody>
-          <a:bodyPr wrap="square" lIns="0" rIns="0" tIns="0" bIns="0" anchor="t">
+          <a:bodyPr wrap="square" lIns="0" tIns="0" rIns="0" bIns="0" anchor="t">
             <a:spAutoFit/>
           </a:bodyPr>
           <a:lstStyle/>
@@ -9139,7 +9325,7 @@
           <a:noFill/>
         </p:spPr>
         <p:txBody>
-          <a:bodyPr wrap="square" lIns="0" rIns="0" tIns="0" bIns="0" anchor="t">
+          <a:bodyPr wrap="square" lIns="0" tIns="0" rIns="0" bIns="0" anchor="t">
             <a:spAutoFit/>
           </a:bodyPr>
           <a:lstStyle/>
@@ -9174,7 +9360,7 @@
           <a:noFill/>
         </p:spPr>
         <p:txBody>
-          <a:bodyPr wrap="square" lIns="0" rIns="0" tIns="0" bIns="0" anchor="t">
+          <a:bodyPr wrap="square" lIns="0" tIns="0" rIns="0" bIns="0" anchor="t">
             <a:spAutoFit/>
           </a:bodyPr>
           <a:lstStyle/>
@@ -9209,7 +9395,7 @@
           <a:noFill/>
         </p:spPr>
         <p:txBody>
-          <a:bodyPr wrap="square" lIns="0" rIns="0" tIns="0" bIns="0" anchor="t">
+          <a:bodyPr wrap="square" lIns="0" tIns="0" rIns="0" bIns="0" anchor="t">
             <a:spAutoFit/>
           </a:bodyPr>
           <a:lstStyle/>
@@ -9236,7 +9422,7 @@
 </file>
 
 <file path=ppt/slides/slide8.xml><?xml version="1.0" encoding="utf-8"?>
-<p:sld xmlns:a="http://schemas.openxmlformats.org/drawingml/2006/main" xmlns:p="http://schemas.openxmlformats.org/presentationml/2006/main" xmlns:r="http://schemas.openxmlformats.org/officeDocument/2006/relationships">
+<p:sld xmlns:a="http://schemas.openxmlformats.org/drawingml/2006/main" xmlns:r="http://schemas.openxmlformats.org/officeDocument/2006/relationships" xmlns:p="http://schemas.openxmlformats.org/presentationml/2006/main">
   <p:cSld>
     <p:spTree>
       <p:nvGrpSpPr>
@@ -9244,7 +9430,14 @@
         <p:cNvGrpSpPr/>
         <p:nvPr/>
       </p:nvGrpSpPr>
-      <p:grpSpPr/>
+      <p:grpSpPr>
+        <a:xfrm>
+          <a:off x="0" y="0"/>
+          <a:ext cx="0" cy="0"/>
+          <a:chOff x="0" y="0"/>
+          <a:chExt cx="0" cy="0"/>
+        </a:xfrm>
+      </p:grpSpPr>
       <p:sp>
         <p:nvSpPr>
           <p:cNvPr id="2" name="Rectangle 1"/>
@@ -9286,6 +9479,7 @@
           <a:lstStyle/>
           <a:p>
             <a:pPr algn="ctr"/>
+            <a:endParaRPr/>
           </a:p>
         </p:txBody>
       </p:sp>
@@ -9329,6 +9523,7 @@
           <a:lstStyle/>
           <a:p>
             <a:pPr algn="ctr"/>
+            <a:endParaRPr/>
           </a:p>
         </p:txBody>
       </p:sp>
@@ -9340,7 +9535,7 @@
         </p:nvSpPr>
         <p:spPr>
           <a:xfrm>
-            <a:off x="822960" y="457200"/>
+            <a:off x="822960" y="551470"/>
             <a:ext cx="7315200" cy="365760"/>
           </a:xfrm>
           <a:prstGeom prst="rect">
@@ -9349,14 +9544,14 @@
           <a:noFill/>
         </p:spPr>
         <p:txBody>
-          <a:bodyPr wrap="square" lIns="0" rIns="0" tIns="0" bIns="0" anchor="t">
+          <a:bodyPr wrap="square" lIns="0" tIns="0" rIns="0" bIns="0" anchor="t">
             <a:spAutoFit/>
           </a:bodyPr>
           <a:lstStyle/>
           <a:p>
             <a:pPr algn="l"/>
             <a:r>
-              <a:rPr sz="1200" b="1" i="0">
+              <a:rPr sz="1200" b="1" i="0" dirty="0">
                 <a:solidFill>
                   <a:srgbClr val="C77DFF"/>
                 </a:solidFill>
@@ -9384,7 +9579,7 @@
           <a:noFill/>
         </p:spPr>
         <p:txBody>
-          <a:bodyPr wrap="square" lIns="0" rIns="0" tIns="0" bIns="0" anchor="t">
+          <a:bodyPr wrap="square" lIns="0" tIns="0" rIns="0" bIns="0" anchor="t">
             <a:spAutoFit/>
           </a:bodyPr>
           <a:lstStyle/>
@@ -9444,6 +9639,7 @@
           <a:lstStyle/>
           <a:p>
             <a:pPr algn="ctr"/>
+            <a:endParaRPr/>
           </a:p>
         </p:txBody>
       </p:sp>
@@ -9464,7 +9660,7 @@
           <a:noFill/>
         </p:spPr>
         <p:txBody>
-          <a:bodyPr wrap="square" lIns="0" rIns="0" tIns="0" bIns="0" anchor="t">
+          <a:bodyPr wrap="square" lIns="0" tIns="0" rIns="0" bIns="0" anchor="t">
             <a:spAutoFit/>
           </a:bodyPr>
           <a:lstStyle/>
@@ -9522,6 +9718,7 @@
           <a:lstStyle/>
           <a:p>
             <a:pPr algn="ctr"/>
+            <a:endParaRPr/>
           </a:p>
         </p:txBody>
       </p:sp>
@@ -9542,7 +9739,7 @@
           <a:noFill/>
         </p:spPr>
         <p:txBody>
-          <a:bodyPr wrap="square" lIns="0" rIns="0" tIns="0" bIns="0" anchor="t">
+          <a:bodyPr wrap="square" lIns="0" tIns="0" rIns="0" bIns="0" anchor="t">
             <a:spAutoFit/>
           </a:bodyPr>
           <a:lstStyle/>
@@ -9600,6 +9797,7 @@
           <a:lstStyle/>
           <a:p>
             <a:pPr algn="ctr"/>
+            <a:endParaRPr/>
           </a:p>
         </p:txBody>
       </p:sp>
@@ -9620,7 +9818,7 @@
           <a:noFill/>
         </p:spPr>
         <p:txBody>
-          <a:bodyPr wrap="square" lIns="0" rIns="0" tIns="0" bIns="0" anchor="t">
+          <a:bodyPr wrap="square" lIns="0" tIns="0" rIns="0" bIns="0" anchor="t">
             <a:spAutoFit/>
           </a:bodyPr>
           <a:lstStyle/>
@@ -9678,6 +9876,7 @@
           <a:lstStyle/>
           <a:p>
             <a:pPr algn="ctr"/>
+            <a:endParaRPr/>
           </a:p>
         </p:txBody>
       </p:sp>
@@ -9698,7 +9897,7 @@
           <a:noFill/>
         </p:spPr>
         <p:txBody>
-          <a:bodyPr wrap="square" lIns="0" rIns="0" tIns="0" bIns="0" anchor="t">
+          <a:bodyPr wrap="square" lIns="0" tIns="0" rIns="0" bIns="0" anchor="t">
             <a:spAutoFit/>
           </a:bodyPr>
           <a:lstStyle/>
@@ -9756,6 +9955,7 @@
           <a:lstStyle/>
           <a:p>
             <a:pPr algn="ctr"/>
+            <a:endParaRPr/>
           </a:p>
         </p:txBody>
       </p:sp>
@@ -9776,7 +9976,7 @@
           <a:noFill/>
         </p:spPr>
         <p:txBody>
-          <a:bodyPr wrap="square" lIns="0" rIns="0" tIns="0" bIns="0" anchor="t">
+          <a:bodyPr wrap="square" lIns="0" tIns="0" rIns="0" bIns="0" anchor="t">
             <a:spAutoFit/>
           </a:bodyPr>
           <a:lstStyle/>
@@ -9834,6 +10034,7 @@
           <a:lstStyle/>
           <a:p>
             <a:pPr algn="ctr"/>
+            <a:endParaRPr/>
           </a:p>
         </p:txBody>
       </p:sp>
@@ -9854,7 +10055,7 @@
           <a:noFill/>
         </p:spPr>
         <p:txBody>
-          <a:bodyPr wrap="square" lIns="0" rIns="0" tIns="0" bIns="0" anchor="t">
+          <a:bodyPr wrap="square" lIns="0" tIns="0" rIns="0" bIns="0" anchor="t">
             <a:spAutoFit/>
           </a:bodyPr>
           <a:lstStyle/>
@@ -9914,6 +10115,7 @@
           <a:lstStyle/>
           <a:p>
             <a:pPr algn="ctr"/>
+            <a:endParaRPr/>
           </a:p>
         </p:txBody>
       </p:sp>
@@ -9934,7 +10136,7 @@
           <a:noFill/>
         </p:spPr>
         <p:txBody>
-          <a:bodyPr wrap="square" lIns="0" rIns="0" tIns="0" bIns="0" anchor="t">
+          <a:bodyPr wrap="square" lIns="0" tIns="0" rIns="0" bIns="0" anchor="t">
             <a:spAutoFit/>
           </a:bodyPr>
           <a:lstStyle/>
@@ -9992,6 +10194,7 @@
           <a:lstStyle/>
           <a:p>
             <a:pPr algn="ctr"/>
+            <a:endParaRPr/>
           </a:p>
         </p:txBody>
       </p:sp>
@@ -10012,7 +10215,7 @@
           <a:noFill/>
         </p:spPr>
         <p:txBody>
-          <a:bodyPr wrap="square" lIns="0" rIns="0" tIns="0" bIns="0" anchor="t">
+          <a:bodyPr wrap="square" lIns="0" tIns="0" rIns="0" bIns="0" anchor="t">
             <a:spAutoFit/>
           </a:bodyPr>
           <a:lstStyle/>
@@ -10070,6 +10273,7 @@
           <a:lstStyle/>
           <a:p>
             <a:pPr algn="ctr"/>
+            <a:endParaRPr/>
           </a:p>
         </p:txBody>
       </p:sp>
@@ -10090,7 +10294,7 @@
           <a:noFill/>
         </p:spPr>
         <p:txBody>
-          <a:bodyPr wrap="square" lIns="0" rIns="0" tIns="0" bIns="0" anchor="t">
+          <a:bodyPr wrap="square" lIns="0" tIns="0" rIns="0" bIns="0" anchor="t">
             <a:spAutoFit/>
           </a:bodyPr>
           <a:lstStyle/>
@@ -10148,6 +10352,7 @@
           <a:lstStyle/>
           <a:p>
             <a:pPr algn="ctr"/>
+            <a:endParaRPr/>
           </a:p>
         </p:txBody>
       </p:sp>
@@ -10168,7 +10373,7 @@
           <a:noFill/>
         </p:spPr>
         <p:txBody>
-          <a:bodyPr wrap="square" lIns="0" rIns="0" tIns="0" bIns="0" anchor="t">
+          <a:bodyPr wrap="square" lIns="0" tIns="0" rIns="0" bIns="0" anchor="t">
             <a:spAutoFit/>
           </a:bodyPr>
           <a:lstStyle/>
@@ -10226,6 +10431,7 @@
           <a:lstStyle/>
           <a:p>
             <a:pPr algn="ctr"/>
+            <a:endParaRPr/>
           </a:p>
         </p:txBody>
       </p:sp>
@@ -10246,7 +10452,7 @@
           <a:noFill/>
         </p:spPr>
         <p:txBody>
-          <a:bodyPr wrap="square" lIns="0" rIns="0" tIns="0" bIns="0" anchor="t">
+          <a:bodyPr wrap="square" lIns="0" tIns="0" rIns="0" bIns="0" anchor="t">
             <a:spAutoFit/>
           </a:bodyPr>
           <a:lstStyle/>
@@ -10304,6 +10510,7 @@
           <a:lstStyle/>
           <a:p>
             <a:pPr algn="ctr"/>
+            <a:endParaRPr/>
           </a:p>
         </p:txBody>
       </p:sp>
@@ -10324,7 +10531,7 @@
           <a:noFill/>
         </p:spPr>
         <p:txBody>
-          <a:bodyPr wrap="square" lIns="0" rIns="0" tIns="0" bIns="0" anchor="t">
+          <a:bodyPr wrap="square" lIns="0" tIns="0" rIns="0" bIns="0" anchor="t">
             <a:spAutoFit/>
           </a:bodyPr>
           <a:lstStyle/>
@@ -10359,7 +10566,7 @@
           <a:noFill/>
         </p:spPr>
         <p:txBody>
-          <a:bodyPr wrap="square" lIns="0" rIns="0" tIns="0" bIns="0" anchor="t">
+          <a:bodyPr wrap="square" lIns="0" tIns="0" rIns="0" bIns="0" anchor="t">
             <a:spAutoFit/>
           </a:bodyPr>
           <a:lstStyle/>
@@ -10386,7 +10593,7 @@
 </file>
 
 <file path=ppt/slides/slide9.xml><?xml version="1.0" encoding="utf-8"?>
-<p:sld xmlns:a="http://schemas.openxmlformats.org/drawingml/2006/main" xmlns:p="http://schemas.openxmlformats.org/presentationml/2006/main" xmlns:r="http://schemas.openxmlformats.org/officeDocument/2006/relationships">
+<p:sld xmlns:a="http://schemas.openxmlformats.org/drawingml/2006/main" xmlns:r="http://schemas.openxmlformats.org/officeDocument/2006/relationships" xmlns:p="http://schemas.openxmlformats.org/presentationml/2006/main">
   <p:cSld>
     <p:spTree>
       <p:nvGrpSpPr>
@@ -10394,7 +10601,14 @@
         <p:cNvGrpSpPr/>
         <p:nvPr/>
       </p:nvGrpSpPr>
-      <p:grpSpPr/>
+      <p:grpSpPr>
+        <a:xfrm>
+          <a:off x="0" y="0"/>
+          <a:ext cx="0" cy="0"/>
+          <a:chOff x="0" y="0"/>
+          <a:chExt cx="0" cy="0"/>
+        </a:xfrm>
+      </p:grpSpPr>
       <p:sp>
         <p:nvSpPr>
           <p:cNvPr id="2" name="Rectangle 1"/>
@@ -10436,6 +10650,7 @@
           <a:lstStyle/>
           <a:p>
             <a:pPr algn="ctr"/>
+            <a:endParaRPr/>
           </a:p>
         </p:txBody>
       </p:sp>
@@ -10479,6 +10694,7 @@
           <a:lstStyle/>
           <a:p>
             <a:pPr algn="ctr"/>
+            <a:endParaRPr/>
           </a:p>
         </p:txBody>
       </p:sp>
@@ -10522,6 +10738,7 @@
           <a:lstStyle/>
           <a:p>
             <a:pPr algn="ctr"/>
+            <a:endParaRPr/>
           </a:p>
         </p:txBody>
       </p:sp>
@@ -10542,7 +10759,7 @@
           <a:noFill/>
         </p:spPr>
         <p:txBody>
-          <a:bodyPr wrap="square" lIns="0" rIns="0" tIns="0" bIns="0" anchor="t">
+          <a:bodyPr wrap="square" lIns="0" tIns="0" rIns="0" bIns="0" anchor="t">
             <a:spAutoFit/>
           </a:bodyPr>
           <a:lstStyle/>
@@ -10577,7 +10794,7 @@
           <a:noFill/>
         </p:spPr>
         <p:txBody>
-          <a:bodyPr wrap="square" lIns="0" rIns="0" tIns="0" bIns="0" anchor="t">
+          <a:bodyPr wrap="square" lIns="0" tIns="0" rIns="0" bIns="0" anchor="t">
             <a:spAutoFit/>
           </a:bodyPr>
           <a:lstStyle/>
@@ -10612,7 +10829,7 @@
           <a:noFill/>
         </p:spPr>
         <p:txBody>
-          <a:bodyPr wrap="square" lIns="0" rIns="0" tIns="0" bIns="0" anchor="t">
+          <a:bodyPr wrap="square" lIns="0" tIns="0" rIns="0" bIns="0" anchor="t">
             <a:spAutoFit/>
           </a:bodyPr>
           <a:lstStyle/>
@@ -10670,6 +10887,7 @@
           <a:lstStyle/>
           <a:p>
             <a:pPr algn="ctr"/>
+            <a:endParaRPr/>
           </a:p>
         </p:txBody>
       </p:sp>
@@ -10690,7 +10908,7 @@
           <a:noFill/>
         </p:spPr>
         <p:txBody>
-          <a:bodyPr wrap="square" lIns="0" rIns="0" tIns="0" bIns="0" anchor="t">
+          <a:bodyPr wrap="square" lIns="0" tIns="0" rIns="0" bIns="0" anchor="t">
             <a:spAutoFit/>
           </a:bodyPr>
           <a:lstStyle/>
@@ -10725,7 +10943,7 @@
           <a:noFill/>
         </p:spPr>
         <p:txBody>
-          <a:bodyPr wrap="square" lIns="0" rIns="0" tIns="0" bIns="0" anchor="t">
+          <a:bodyPr wrap="square" lIns="0" tIns="0" rIns="0" bIns="0" anchor="t">
             <a:spAutoFit/>
           </a:bodyPr>
           <a:lstStyle/>
@@ -10783,6 +11001,7 @@
           <a:lstStyle/>
           <a:p>
             <a:pPr algn="ctr"/>
+            <a:endParaRPr/>
           </a:p>
         </p:txBody>
       </p:sp>
@@ -10803,7 +11022,7 @@
           <a:noFill/>
         </p:spPr>
         <p:txBody>
-          <a:bodyPr wrap="square" lIns="0" rIns="0" tIns="0" bIns="0" anchor="t">
+          <a:bodyPr wrap="square" lIns="0" tIns="0" rIns="0" bIns="0" anchor="t">
             <a:spAutoFit/>
           </a:bodyPr>
           <a:lstStyle/>
@@ -10838,7 +11057,7 @@
           <a:noFill/>
         </p:spPr>
         <p:txBody>
-          <a:bodyPr wrap="square" lIns="0" rIns="0" tIns="0" bIns="0" anchor="t">
+          <a:bodyPr wrap="square" lIns="0" tIns="0" rIns="0" bIns="0" anchor="t">
             <a:spAutoFit/>
           </a:bodyPr>
           <a:lstStyle/>
@@ -10896,6 +11115,7 @@
           <a:lstStyle/>
           <a:p>
             <a:pPr algn="ctr"/>
+            <a:endParaRPr/>
           </a:p>
         </p:txBody>
       </p:sp>
@@ -10916,7 +11136,7 @@
           <a:noFill/>
         </p:spPr>
         <p:txBody>
-          <a:bodyPr wrap="square" lIns="0" rIns="0" tIns="0" bIns="0" anchor="t">
+          <a:bodyPr wrap="square" lIns="0" tIns="0" rIns="0" bIns="0" anchor="t">
             <a:spAutoFit/>
           </a:bodyPr>
           <a:lstStyle/>
@@ -10951,7 +11171,7 @@
           <a:noFill/>
         </p:spPr>
         <p:txBody>
-          <a:bodyPr wrap="square" lIns="0" rIns="0" tIns="0" bIns="0" anchor="t">
+          <a:bodyPr wrap="square" lIns="0" tIns="0" rIns="0" bIns="0" anchor="t">
             <a:spAutoFit/>
           </a:bodyPr>
           <a:lstStyle/>
@@ -10986,7 +11206,7 @@
           <a:noFill/>
         </p:spPr>
         <p:txBody>
-          <a:bodyPr wrap="square" lIns="0" rIns="0" tIns="0" bIns="0" anchor="t">
+          <a:bodyPr wrap="square" lIns="0" tIns="0" rIns="0" bIns="0" anchor="t">
             <a:spAutoFit/>
           </a:bodyPr>
           <a:lstStyle/>

--- a/_doku/Praesentation_TwitchLandingpage_v3.pptx
+++ b/_doku/Praesentation_TwitchLandingpage_v3.pptx
@@ -2804,56 +2804,6 @@
               <a:t>‹Nr.›</a:t>
             </a:fld>
             <a:endParaRPr lang="en-US"/>
-          </a:p>
-        </p:txBody>
-      </p:sp>
-      <p:sp>
-        <p:nvSpPr>
-          <p:cNvPr id="8" name="Textfeld 7">
-            <a:extLst>
-              <a:ext uri="{FF2B5EF4-FFF2-40B4-BE49-F238E27FC236}">
-                <a16:creationId xmlns:a16="http://schemas.microsoft.com/office/drawing/2014/main" id="{41180E1C-49CE-C145-9F8F-F8C5114BF3ED}"/>
-              </a:ext>
-            </a:extLst>
-          </p:cNvPr>
-          <p:cNvSpPr txBox="1"/>
-          <p:nvPr userDrawn="1">
-            <p:extLst>
-              <p:ext uri="{1162E1C5-73C7-4A58-AE30-91384D911F3F}">
-                <p184:classification xmlns:p184="http://schemas.microsoft.com/office/powerpoint/2018/4/main" val="ftr"/>
-              </p:ext>
-            </p:extLst>
-          </p:nvPr>
-        </p:nvSpPr>
-        <p:spPr>
-          <a:xfrm>
-            <a:off x="5861812" y="6642100"/>
-            <a:ext cx="496888" cy="152400"/>
-          </a:xfrm>
-          <a:prstGeom prst="rect">
-            <a:avLst/>
-          </a:prstGeom>
-        </p:spPr>
-        <p:txBody>
-          <a:bodyPr horzOverflow="overflow" lIns="0" tIns="0" rIns="0" bIns="0">
-            <a:spAutoFit/>
-          </a:bodyPr>
-          <a:lstStyle/>
-          <a:p>
-            <a:pPr algn="l"/>
-            <a:r>
-              <a:rPr lang="de-DE" sz="1000">
-                <a:solidFill>
-                  <a:srgbClr val="000000">
-                    <a:alpha val="50000"/>
-                  </a:srgbClr>
-                </a:solidFill>
-                <a:latin typeface="Calibri" panose="020F0502020204030204" pitchFamily="34" charset="0"/>
-                <a:ea typeface="Calibri" panose="020F0502020204030204" pitchFamily="34" charset="0"/>
-                <a:cs typeface="Calibri" panose="020F0502020204030204" pitchFamily="34" charset="0"/>
-              </a:rPr>
-              <a:t>[INTERN]</a:t>
-            </a:r>
           </a:p>
         </p:txBody>
       </p:sp>
@@ -4816,23 +4766,23 @@
         </p:nvSpPr>
         <p:spPr>
           <a:xfrm>
-            <a:off x="914400" y="2898648"/>
-            <a:ext cx="548640" cy="548640"/>
-          </a:xfrm>
-          <a:prstGeom prst="rect">
-            <a:avLst/>
-          </a:prstGeom>
-          <a:noFill/>
-        </p:spPr>
-        <p:txBody>
-          <a:bodyPr wrap="square" lIns="0" tIns="0" rIns="0" bIns="0" anchor="t">
+            <a:off x="904973" y="2992918"/>
+            <a:ext cx="548640" cy="338554"/>
+          </a:xfrm>
+          <a:prstGeom prst="rect">
+            <a:avLst/>
+          </a:prstGeom>
+          <a:noFill/>
+        </p:spPr>
+        <p:txBody>
+          <a:bodyPr wrap="square" lIns="0" tIns="0" rIns="0" bIns="0" anchor="ctr">
             <a:spAutoFit/>
           </a:bodyPr>
           <a:lstStyle/>
           <a:p>
             <a:pPr algn="ctr"/>
             <a:r>
-              <a:rPr sz="2200" b="1" i="0">
+              <a:rPr sz="2200" b="1" i="0" dirty="0">
                 <a:solidFill>
                   <a:srgbClr val="FFFFFF"/>
                 </a:solidFill>
@@ -5012,16 +4962,16 @@
         </p:nvSpPr>
         <p:spPr>
           <a:xfrm>
-            <a:off x="914400" y="4105656"/>
-            <a:ext cx="548640" cy="548640"/>
-          </a:xfrm>
-          <a:prstGeom prst="rect">
-            <a:avLst/>
-          </a:prstGeom>
-          <a:noFill/>
-        </p:spPr>
-        <p:txBody>
-          <a:bodyPr wrap="square" lIns="0" tIns="0" rIns="0" bIns="0" anchor="t">
+            <a:off x="904973" y="4199926"/>
+            <a:ext cx="548640" cy="338554"/>
+          </a:xfrm>
+          <a:prstGeom prst="rect">
+            <a:avLst/>
+          </a:prstGeom>
+          <a:noFill/>
+        </p:spPr>
+        <p:txBody>
+          <a:bodyPr wrap="square" lIns="0" tIns="0" rIns="0" bIns="0" anchor="ctr">
             <a:spAutoFit/>
           </a:bodyPr>
           <a:lstStyle/>
@@ -5208,16 +5158,16 @@
         </p:nvSpPr>
         <p:spPr>
           <a:xfrm>
-            <a:off x="914400" y="5312664"/>
-            <a:ext cx="548640" cy="548640"/>
-          </a:xfrm>
-          <a:prstGeom prst="rect">
-            <a:avLst/>
-          </a:prstGeom>
-          <a:noFill/>
-        </p:spPr>
-        <p:txBody>
-          <a:bodyPr wrap="square" lIns="0" tIns="0" rIns="0" bIns="0" anchor="t">
+            <a:off x="904973" y="5406934"/>
+            <a:ext cx="548640" cy="338554"/>
+          </a:xfrm>
+          <a:prstGeom prst="rect">
+            <a:avLst/>
+          </a:prstGeom>
+          <a:noFill/>
+        </p:spPr>
+        <p:txBody>
+          <a:bodyPr wrap="square" lIns="0" tIns="0" rIns="0" bIns="0" anchor="ctr">
             <a:spAutoFit/>
           </a:bodyPr>
           <a:lstStyle/>
@@ -5693,7 +5643,7 @@
         </p:nvSpPr>
         <p:spPr>
           <a:xfrm>
-            <a:off x="1005840" y="3310128"/>
+            <a:off x="1005840" y="3385544"/>
             <a:ext cx="502920" cy="502920"/>
           </a:xfrm>
           <a:prstGeom prst="rect">
@@ -5888,7 +5838,7 @@
         </p:nvSpPr>
         <p:spPr>
           <a:xfrm>
-            <a:off x="4937760" y="3310128"/>
+            <a:off x="4937760" y="3385544"/>
             <a:ext cx="502920" cy="502920"/>
           </a:xfrm>
           <a:prstGeom prst="rect">
@@ -6083,7 +6033,7 @@
         </p:nvSpPr>
         <p:spPr>
           <a:xfrm>
-            <a:off x="8869680" y="3310128"/>
+            <a:off x="8869680" y="3385544"/>
             <a:ext cx="502920" cy="502920"/>
           </a:xfrm>
           <a:prstGeom prst="rect">
@@ -6568,7 +6518,7 @@
         </p:nvSpPr>
         <p:spPr>
           <a:xfrm>
-            <a:off x="868680" y="2688336"/>
+            <a:off x="868680" y="2773178"/>
             <a:ext cx="502920" cy="502920"/>
           </a:xfrm>
           <a:prstGeom prst="rect">
@@ -6763,7 +6713,7 @@
         </p:nvSpPr>
         <p:spPr>
           <a:xfrm>
-            <a:off x="6629400" y="2688336"/>
+            <a:off x="6629400" y="2773178"/>
             <a:ext cx="502920" cy="502920"/>
           </a:xfrm>
           <a:prstGeom prst="rect">
@@ -6958,7 +6908,7 @@
         </p:nvSpPr>
         <p:spPr>
           <a:xfrm>
-            <a:off x="868680" y="3922776"/>
+            <a:off x="868680" y="4007618"/>
             <a:ext cx="502920" cy="502920"/>
           </a:xfrm>
           <a:prstGeom prst="rect">
@@ -7153,7 +7103,7 @@
         </p:nvSpPr>
         <p:spPr>
           <a:xfrm>
-            <a:off x="6629400" y="3922776"/>
+            <a:off x="6629400" y="4007618"/>
             <a:ext cx="502920" cy="502920"/>
           </a:xfrm>
           <a:prstGeom prst="rect">
@@ -7348,7 +7298,7 @@
         </p:nvSpPr>
         <p:spPr>
           <a:xfrm>
-            <a:off x="868680" y="5157216"/>
+            <a:off x="868680" y="5242058"/>
             <a:ext cx="502920" cy="502920"/>
           </a:xfrm>
           <a:prstGeom prst="rect">
@@ -7543,7 +7493,7 @@
         </p:nvSpPr>
         <p:spPr>
           <a:xfrm>
-            <a:off x="6629400" y="5157216"/>
+            <a:off x="6629400" y="5242058"/>
             <a:ext cx="502920" cy="502920"/>
           </a:xfrm>
           <a:prstGeom prst="rect">
@@ -8271,7 +8221,7 @@
         </p:nvSpPr>
         <p:spPr>
           <a:xfrm>
-            <a:off x="7498080" y="1563624"/>
+            <a:off x="7498080" y="1648467"/>
             <a:ext cx="411480" cy="411480"/>
           </a:xfrm>
           <a:prstGeom prst="rect">
@@ -8287,7 +8237,7 @@
           <a:p>
             <a:pPr algn="ctr"/>
             <a:r>
-              <a:rPr sz="1400" b="1" i="0">
+              <a:rPr sz="1400" b="1" i="0" dirty="0">
                 <a:solidFill>
                   <a:srgbClr val="FFFFFF"/>
                 </a:solidFill>
@@ -8466,7 +8416,7 @@
         </p:nvSpPr>
         <p:spPr>
           <a:xfrm>
-            <a:off x="7498080" y="2450592"/>
+            <a:off x="7498080" y="2535435"/>
             <a:ext cx="411480" cy="411480"/>
           </a:xfrm>
           <a:prstGeom prst="rect">
@@ -8482,7 +8432,7 @@
           <a:p>
             <a:pPr algn="ctr"/>
             <a:r>
-              <a:rPr sz="1400" b="1" i="0">
+              <a:rPr sz="1400" b="1" i="0" dirty="0">
                 <a:solidFill>
                   <a:srgbClr val="FFFFFF"/>
                 </a:solidFill>
@@ -8661,7 +8611,7 @@
         </p:nvSpPr>
         <p:spPr>
           <a:xfrm>
-            <a:off x="7498080" y="3337560"/>
+            <a:off x="7498080" y="3422403"/>
             <a:ext cx="411480" cy="411480"/>
           </a:xfrm>
           <a:prstGeom prst="rect">
@@ -8856,7 +8806,7 @@
         </p:nvSpPr>
         <p:spPr>
           <a:xfrm>
-            <a:off x="7498080" y="4224528"/>
+            <a:off x="7498080" y="4309371"/>
             <a:ext cx="411480" cy="411480"/>
           </a:xfrm>
           <a:prstGeom prst="rect">
@@ -9051,7 +9001,7 @@
         </p:nvSpPr>
         <p:spPr>
           <a:xfrm>
-            <a:off x="7498080" y="5111496"/>
+            <a:off x="7498080" y="5196339"/>
             <a:ext cx="411480" cy="411480"/>
           </a:xfrm>
           <a:prstGeom prst="rect">
@@ -9246,7 +9196,7 @@
         </p:nvSpPr>
         <p:spPr>
           <a:xfrm>
-            <a:off x="7498080" y="5998464"/>
+            <a:off x="7498080" y="6083307"/>
             <a:ext cx="411480" cy="411480"/>
           </a:xfrm>
           <a:prstGeom prst="rect">
@@ -9686,7 +9636,7 @@
         </p:nvSpPr>
         <p:spPr>
           <a:xfrm>
-            <a:off x="914400" y="3136392"/>
+            <a:off x="914400" y="3034792"/>
             <a:ext cx="164592" cy="164592"/>
           </a:xfrm>
           <a:prstGeom prst="ellipse">
@@ -9765,7 +9715,7 @@
         </p:nvSpPr>
         <p:spPr>
           <a:xfrm>
-            <a:off x="914400" y="3639312"/>
+            <a:off x="914400" y="3537712"/>
             <a:ext cx="164592" cy="164592"/>
           </a:xfrm>
           <a:prstGeom prst="ellipse">
@@ -9844,7 +9794,7 @@
         </p:nvSpPr>
         <p:spPr>
           <a:xfrm>
-            <a:off x="914400" y="4142232"/>
+            <a:off x="914400" y="4040632"/>
             <a:ext cx="164592" cy="164592"/>
           </a:xfrm>
           <a:prstGeom prst="ellipse">
@@ -9923,7 +9873,7 @@
         </p:nvSpPr>
         <p:spPr>
           <a:xfrm>
-            <a:off x="914400" y="4645152"/>
+            <a:off x="914400" y="4543552"/>
             <a:ext cx="164592" cy="164592"/>
           </a:xfrm>
           <a:prstGeom prst="ellipse">
@@ -10002,7 +9952,7 @@
         </p:nvSpPr>
         <p:spPr>
           <a:xfrm>
-            <a:off x="914400" y="5148072"/>
+            <a:off x="914400" y="5046472"/>
             <a:ext cx="164592" cy="164592"/>
           </a:xfrm>
           <a:prstGeom prst="ellipse">
@@ -10162,7 +10112,7 @@
         </p:nvSpPr>
         <p:spPr>
           <a:xfrm>
-            <a:off x="6492240" y="3136392"/>
+            <a:off x="6492240" y="3034792"/>
             <a:ext cx="164592" cy="164592"/>
           </a:xfrm>
           <a:prstGeom prst="ellipse">
@@ -10241,7 +10191,7 @@
         </p:nvSpPr>
         <p:spPr>
           <a:xfrm>
-            <a:off x="6492240" y="3639312"/>
+            <a:off x="6492240" y="3537712"/>
             <a:ext cx="164592" cy="164592"/>
           </a:xfrm>
           <a:prstGeom prst="ellipse">
@@ -10320,7 +10270,7 @@
         </p:nvSpPr>
         <p:spPr>
           <a:xfrm>
-            <a:off x="6492240" y="4142232"/>
+            <a:off x="6492240" y="4040632"/>
             <a:ext cx="164592" cy="164592"/>
           </a:xfrm>
           <a:prstGeom prst="ellipse">
@@ -10399,7 +10349,7 @@
         </p:nvSpPr>
         <p:spPr>
           <a:xfrm>
-            <a:off x="6492240" y="4645152"/>
+            <a:off x="6492240" y="4543552"/>
             <a:ext cx="164592" cy="164592"/>
           </a:xfrm>
           <a:prstGeom prst="ellipse">
@@ -10478,7 +10428,7 @@
         </p:nvSpPr>
         <p:spPr>
           <a:xfrm>
-            <a:off x="6492240" y="5148072"/>
+            <a:off x="6492240" y="5046472"/>
             <a:ext cx="164592" cy="164592"/>
           </a:xfrm>
           <a:prstGeom prst="ellipse">
@@ -10855,7 +10805,7 @@
         </p:nvSpPr>
         <p:spPr>
           <a:xfrm>
-            <a:off x="4114800" y="3767328"/>
+            <a:off x="4114800" y="3678428"/>
             <a:ext cx="201168" cy="201168"/>
           </a:xfrm>
           <a:prstGeom prst="ellipse">
@@ -10969,7 +10919,7 @@
         </p:nvSpPr>
         <p:spPr>
           <a:xfrm>
-            <a:off x="4114800" y="4480560"/>
+            <a:off x="4114800" y="4391660"/>
             <a:ext cx="201168" cy="201168"/>
           </a:xfrm>
           <a:prstGeom prst="ellipse">
@@ -11083,7 +11033,7 @@
         </p:nvSpPr>
         <p:spPr>
           <a:xfrm>
-            <a:off x="4114800" y="5193792"/>
+            <a:off x="4114800" y="5104892"/>
             <a:ext cx="201168" cy="201168"/>
           </a:xfrm>
           <a:prstGeom prst="ellipse">

--- a/_doku/Praesentation_TwitchLandingpage_v3.pptx
+++ b/_doku/Praesentation_TwitchLandingpage_v3.pptx
@@ -310,7 +310,7 @@
           <a:p>
             <a:fld id="{5BCAD085-E8A6-8845-BD4E-CB4CCA059FC4}" type="datetimeFigureOut">
               <a:rPr lang="en-US" smtClean="0"/>
-              <a:t>5/11/2026</a:t>
+              <a:t>5/14/2026</a:t>
             </a:fld>
             <a:endParaRPr lang="en-US"/>
           </a:p>
@@ -478,7 +478,7 @@
           <a:p>
             <a:fld id="{5BCAD085-E8A6-8845-BD4E-CB4CCA059FC4}" type="datetimeFigureOut">
               <a:rPr lang="en-US" smtClean="0"/>
-              <a:t>5/11/2026</a:t>
+              <a:t>5/14/2026</a:t>
             </a:fld>
             <a:endParaRPr lang="en-US"/>
           </a:p>
@@ -656,7 +656,7 @@
           <a:p>
             <a:fld id="{5BCAD085-E8A6-8845-BD4E-CB4CCA059FC4}" type="datetimeFigureOut">
               <a:rPr lang="en-US" smtClean="0"/>
-              <a:t>5/11/2026</a:t>
+              <a:t>5/14/2026</a:t>
             </a:fld>
             <a:endParaRPr lang="en-US"/>
           </a:p>
@@ -824,7 +824,7 @@
           <a:p>
             <a:fld id="{5BCAD085-E8A6-8845-BD4E-CB4CCA059FC4}" type="datetimeFigureOut">
               <a:rPr lang="en-US" smtClean="0"/>
-              <a:t>5/11/2026</a:t>
+              <a:t>5/14/2026</a:t>
             </a:fld>
             <a:endParaRPr lang="en-US"/>
           </a:p>
@@ -1069,7 +1069,7 @@
           <a:p>
             <a:fld id="{5BCAD085-E8A6-8845-BD4E-CB4CCA059FC4}" type="datetimeFigureOut">
               <a:rPr lang="en-US" smtClean="0"/>
-              <a:t>5/11/2026</a:t>
+              <a:t>5/14/2026</a:t>
             </a:fld>
             <a:endParaRPr lang="en-US"/>
           </a:p>
@@ -1354,7 +1354,7 @@
           <a:p>
             <a:fld id="{5BCAD085-E8A6-8845-BD4E-CB4CCA059FC4}" type="datetimeFigureOut">
               <a:rPr lang="en-US" smtClean="0"/>
-              <a:t>5/11/2026</a:t>
+              <a:t>5/14/2026</a:t>
             </a:fld>
             <a:endParaRPr lang="en-US"/>
           </a:p>
@@ -1773,7 +1773,7 @@
           <a:p>
             <a:fld id="{5BCAD085-E8A6-8845-BD4E-CB4CCA059FC4}" type="datetimeFigureOut">
               <a:rPr lang="en-US" smtClean="0"/>
-              <a:t>5/11/2026</a:t>
+              <a:t>5/14/2026</a:t>
             </a:fld>
             <a:endParaRPr lang="en-US"/>
           </a:p>
@@ -1890,7 +1890,7 @@
           <a:p>
             <a:fld id="{5BCAD085-E8A6-8845-BD4E-CB4CCA059FC4}" type="datetimeFigureOut">
               <a:rPr lang="en-US" smtClean="0"/>
-              <a:t>5/11/2026</a:t>
+              <a:t>5/14/2026</a:t>
             </a:fld>
             <a:endParaRPr lang="en-US"/>
           </a:p>
@@ -1985,7 +1985,7 @@
           <a:p>
             <a:fld id="{5BCAD085-E8A6-8845-BD4E-CB4CCA059FC4}" type="datetimeFigureOut">
               <a:rPr lang="en-US" smtClean="0"/>
-              <a:t>5/11/2026</a:t>
+              <a:t>5/14/2026</a:t>
             </a:fld>
             <a:endParaRPr lang="en-US"/>
           </a:p>
@@ -2260,7 +2260,7 @@
           <a:p>
             <a:fld id="{5BCAD085-E8A6-8845-BD4E-CB4CCA059FC4}" type="datetimeFigureOut">
               <a:rPr lang="en-US" smtClean="0"/>
-              <a:t>5/11/2026</a:t>
+              <a:t>5/14/2026</a:t>
             </a:fld>
             <a:endParaRPr lang="en-US"/>
           </a:p>
@@ -2512,7 +2512,7 @@
           <a:p>
             <a:fld id="{5BCAD085-E8A6-8845-BD4E-CB4CCA059FC4}" type="datetimeFigureOut">
               <a:rPr lang="en-US" smtClean="0"/>
-              <a:t>5/11/2026</a:t>
+              <a:t>5/14/2026</a:t>
             </a:fld>
             <a:endParaRPr lang="en-US"/>
           </a:p>
@@ -2723,7 +2723,7 @@
           <a:p>
             <a:fld id="{5BCAD085-E8A6-8845-BD4E-CB4CCA059FC4}" type="datetimeFigureOut">
               <a:rPr lang="en-US" smtClean="0"/>
-              <a:t>5/11/2026</a:t>
+              <a:t>5/14/2026</a:t>
             </a:fld>
             <a:endParaRPr lang="en-US"/>
           </a:p>
@@ -7842,7 +7842,7 @@
         <p:spPr>
           <a:xfrm>
             <a:off x="548640" y="6446520"/>
-            <a:ext cx="11064240" cy="320040"/>
+            <a:ext cx="11064240" cy="169277"/>
           </a:xfrm>
           <a:prstGeom prst="rect">
             <a:avLst/>
@@ -7857,13 +7857,103 @@
           <a:p>
             <a:pPr algn="ctr"/>
             <a:r>
-              <a:rPr sz="1100" b="0" i="1">
+              <a:rPr sz="1100" b="0" i="1" dirty="0">
                 <a:solidFill>
                   <a:srgbClr val="554B6E"/>
                 </a:solidFill>
                 <a:latin typeface="Calibri"/>
               </a:rPr>
-              <a:t>Frontend ↔ Supabase  ·  TwitchAddon (Bun, Railway)  ·  DiscordBot (Render)  ·  pg_net Webhooks</a:t>
+              <a:t>Frontend ↔ </a:t>
+            </a:r>
+            <a:r>
+              <a:rPr sz="1100" b="0" i="1" dirty="0" err="1">
+                <a:solidFill>
+                  <a:srgbClr val="554B6E"/>
+                </a:solidFill>
+                <a:latin typeface="Calibri"/>
+              </a:rPr>
+              <a:t>Supabase</a:t>
+            </a:r>
+            <a:r>
+              <a:rPr sz="1100" b="0" i="1" dirty="0">
+                <a:solidFill>
+                  <a:srgbClr val="554B6E"/>
+                </a:solidFill>
+                <a:latin typeface="Calibri"/>
+              </a:rPr>
+              <a:t>  ·  </a:t>
+            </a:r>
+            <a:r>
+              <a:rPr sz="1100" b="0" i="1" dirty="0" err="1">
+                <a:solidFill>
+                  <a:srgbClr val="554B6E"/>
+                </a:solidFill>
+                <a:latin typeface="Calibri"/>
+              </a:rPr>
+              <a:t>TwitchAddon</a:t>
+            </a:r>
+            <a:r>
+              <a:rPr sz="1100" b="0" i="1" dirty="0">
+                <a:solidFill>
+                  <a:srgbClr val="554B6E"/>
+                </a:solidFill>
+                <a:latin typeface="Calibri"/>
+              </a:rPr>
+              <a:t> (Bun</a:t>
+            </a:r>
+            <a:r>
+              <a:rPr lang="de-DE" sz="1100" b="0" i="1" dirty="0">
+                <a:solidFill>
+                  <a:srgbClr val="554B6E"/>
+                </a:solidFill>
+                <a:latin typeface="Calibri"/>
+              </a:rPr>
+              <a:t>) </a:t>
+            </a:r>
+            <a:r>
+              <a:rPr sz="1100" b="0" i="1" dirty="0">
+                <a:solidFill>
+                  <a:srgbClr val="554B6E"/>
+                </a:solidFill>
+                <a:latin typeface="Calibri"/>
+              </a:rPr>
+              <a:t>·  </a:t>
+            </a:r>
+            <a:r>
+              <a:rPr sz="1100" b="0" i="1" dirty="0" err="1">
+                <a:solidFill>
+                  <a:srgbClr val="554B6E"/>
+                </a:solidFill>
+                <a:latin typeface="Calibri"/>
+              </a:rPr>
+              <a:t>DiscordBot</a:t>
+            </a:r>
+            <a:r>
+              <a:rPr sz="1100" b="0" i="1" dirty="0">
+                <a:solidFill>
+                  <a:srgbClr val="554B6E"/>
+                </a:solidFill>
+                <a:latin typeface="Calibri"/>
+              </a:rPr>
+              <a:t> (Render)  ·  </a:t>
+            </a:r>
+            <a:r>
+              <a:rPr sz="1100" b="0" i="1" dirty="0" err="1">
+                <a:solidFill>
+                  <a:srgbClr val="554B6E"/>
+                </a:solidFill>
+                <a:latin typeface="Calibri"/>
+              </a:rPr>
+              <a:t>pg_net</a:t>
+            </a:r>
+            <a:r>
+              <a:rPr sz="1100" b="0" i="1" dirty="0">
+                <a:solidFill>
+                  <a:srgbClr val="554B6E"/>
+                </a:solidFill>
+                <a:latin typeface="Calibri"/>
+              </a:rPr>
+              <a:t> Webhooks</a:t>
             </a:r>
           </a:p>
         </p:txBody>
@@ -7903,6 +7993,66 @@
           </a:p>
         </p:txBody>
       </p:sp>
+      <p:pic>
+        <p:nvPicPr>
+          <p:cNvPr id="10" name="Grafik 9">
+            <a:extLst>
+              <a:ext uri="{FF2B5EF4-FFF2-40B4-BE49-F238E27FC236}">
+                <a16:creationId xmlns:a16="http://schemas.microsoft.com/office/drawing/2014/main" id="{4BF36726-2D46-19DB-8C31-62134100B28E}"/>
+              </a:ext>
+            </a:extLst>
+          </p:cNvPr>
+          <p:cNvPicPr>
+            <a:picLocks noChangeAspect="1"/>
+          </p:cNvPicPr>
+          <p:nvPr/>
+        </p:nvPicPr>
+        <p:blipFill>
+          <a:blip r:embed="rId3"/>
+          <a:stretch>
+            <a:fillRect/>
+          </a:stretch>
+        </p:blipFill>
+        <p:spPr>
+          <a:xfrm>
+            <a:off x="7746158" y="3914777"/>
+            <a:ext cx="168269" cy="71457"/>
+          </a:xfrm>
+          <a:prstGeom prst="rect">
+            <a:avLst/>
+          </a:prstGeom>
+        </p:spPr>
+      </p:pic>
+      <p:pic>
+        <p:nvPicPr>
+          <p:cNvPr id="12" name="Grafik 11">
+            <a:extLst>
+              <a:ext uri="{FF2B5EF4-FFF2-40B4-BE49-F238E27FC236}">
+                <a16:creationId xmlns:a16="http://schemas.microsoft.com/office/drawing/2014/main" id="{E6EC975C-D8C6-0588-781F-0B0135AFEBCA}"/>
+              </a:ext>
+            </a:extLst>
+          </p:cNvPr>
+          <p:cNvPicPr>
+            <a:picLocks noChangeAspect="1"/>
+          </p:cNvPicPr>
+          <p:nvPr/>
+        </p:nvPicPr>
+        <p:blipFill>
+          <a:blip r:embed="rId4"/>
+          <a:stretch>
+            <a:fillRect/>
+          </a:stretch>
+        </p:blipFill>
+        <p:spPr>
+          <a:xfrm>
+            <a:off x="7812841" y="3917158"/>
+            <a:ext cx="285790" cy="71721"/>
+          </a:xfrm>
+          <a:prstGeom prst="rect">
+            <a:avLst/>
+          </a:prstGeom>
+        </p:spPr>
+      </p:pic>
     </p:spTree>
   </p:cSld>
   <p:clrMapOvr>
